--- a/public/fun/cards/life/life-12.pptx
+++ b/public/fun/cards/life/life-12.pptx
@@ -3085,7 +3085,7 @@
     <p:bg>
       <p:bgPr>
         <a:solidFill>
-          <a:srgbClr val="FBF8F2"/>
+          <a:srgbClr val="F3F4F6"/>
         </a:solidFill>
         <a:effectLst/>
       </p:bgPr>
@@ -3099,14 +3099,594 @@
       <p:grpSpPr/>
       <p:sp>
         <p:nvSpPr>
-          <p:cNvPr id="2" name="텍스트"/>
+          <p:cNvPr id="2" name="Oval 1"/>
+          <p:cNvSpPr/>
+          <p:nvPr/>
+        </p:nvSpPr>
+        <p:spPr>
+          <a:xfrm>
+            <a:off x="2646000" y="234000"/>
+            <a:ext cx="36000" cy="36000"/>
+          </a:xfrm>
+          <a:prstGeom prst="ellipse">
+            <a:avLst/>
+          </a:prstGeom>
+          <a:solidFill>
+            <a:srgbClr val="7A2CF5"/>
+          </a:solidFill>
+          <a:ln>
+            <a:noFill/>
+          </a:ln>
+        </p:spPr>
+        <p:txBody>
+          <a:bodyPr rtlCol="0" anchor="ctr"/>
+          <a:lstStyle/>
+          <a:p>
+            <a:pPr algn="ctr"/>
+          </a:p>
+        </p:txBody>
+      </p:sp>
+      <p:sp>
+        <p:nvSpPr>
+          <p:cNvPr id="3" name="Oval 2"/>
+          <p:cNvSpPr/>
+          <p:nvPr/>
+        </p:nvSpPr>
+        <p:spPr>
+          <a:xfrm>
+            <a:off x="2646000" y="334800"/>
+            <a:ext cx="36000" cy="36000"/>
+          </a:xfrm>
+          <a:prstGeom prst="ellipse">
+            <a:avLst/>
+          </a:prstGeom>
+          <a:solidFill>
+            <a:srgbClr val="E2D8F6"/>
+          </a:solidFill>
+          <a:ln>
+            <a:noFill/>
+          </a:ln>
+        </p:spPr>
+        <p:txBody>
+          <a:bodyPr rtlCol="0" anchor="ctr"/>
+          <a:lstStyle/>
+          <a:p>
+            <a:pPr algn="ctr"/>
+          </a:p>
+        </p:txBody>
+      </p:sp>
+      <p:sp>
+        <p:nvSpPr>
+          <p:cNvPr id="4" name="Oval 3"/>
+          <p:cNvSpPr/>
+          <p:nvPr/>
+        </p:nvSpPr>
+        <p:spPr>
+          <a:xfrm>
+            <a:off x="2646000" y="435600"/>
+            <a:ext cx="36000" cy="36000"/>
+          </a:xfrm>
+          <a:prstGeom prst="ellipse">
+            <a:avLst/>
+          </a:prstGeom>
+          <a:solidFill>
+            <a:srgbClr val="E2D8F6"/>
+          </a:solidFill>
+          <a:ln>
+            <a:noFill/>
+          </a:ln>
+        </p:spPr>
+        <p:txBody>
+          <a:bodyPr rtlCol="0" anchor="ctr"/>
+          <a:lstStyle/>
+          <a:p>
+            <a:pPr algn="ctr"/>
+          </a:p>
+        </p:txBody>
+      </p:sp>
+      <p:sp>
+        <p:nvSpPr>
+          <p:cNvPr id="5" name="Oval 4"/>
+          <p:cNvSpPr/>
+          <p:nvPr/>
+        </p:nvSpPr>
+        <p:spPr>
+          <a:xfrm>
+            <a:off x="2646000" y="536400"/>
+            <a:ext cx="36000" cy="36000"/>
+          </a:xfrm>
+          <a:prstGeom prst="ellipse">
+            <a:avLst/>
+          </a:prstGeom>
+          <a:solidFill>
+            <a:srgbClr val="7A2CF5"/>
+          </a:solidFill>
+          <a:ln>
+            <a:noFill/>
+          </a:ln>
+        </p:spPr>
+        <p:txBody>
+          <a:bodyPr rtlCol="0" anchor="ctr"/>
+          <a:lstStyle/>
+          <a:p>
+            <a:pPr algn="ctr"/>
+          </a:p>
+        </p:txBody>
+      </p:sp>
+      <p:sp>
+        <p:nvSpPr>
+          <p:cNvPr id="6" name="Oval 5"/>
+          <p:cNvSpPr/>
+          <p:nvPr/>
+        </p:nvSpPr>
+        <p:spPr>
+          <a:xfrm>
+            <a:off x="2746800" y="234000"/>
+            <a:ext cx="36000" cy="36000"/>
+          </a:xfrm>
+          <a:prstGeom prst="ellipse">
+            <a:avLst/>
+          </a:prstGeom>
+          <a:solidFill>
+            <a:srgbClr val="E2D8F6"/>
+          </a:solidFill>
+          <a:ln>
+            <a:noFill/>
+          </a:ln>
+        </p:spPr>
+        <p:txBody>
+          <a:bodyPr rtlCol="0" anchor="ctr"/>
+          <a:lstStyle/>
+          <a:p>
+            <a:pPr algn="ctr"/>
+          </a:p>
+        </p:txBody>
+      </p:sp>
+      <p:sp>
+        <p:nvSpPr>
+          <p:cNvPr id="7" name="Oval 6"/>
+          <p:cNvSpPr/>
+          <p:nvPr/>
+        </p:nvSpPr>
+        <p:spPr>
+          <a:xfrm>
+            <a:off x="2746800" y="334800"/>
+            <a:ext cx="36000" cy="36000"/>
+          </a:xfrm>
+          <a:prstGeom prst="ellipse">
+            <a:avLst/>
+          </a:prstGeom>
+          <a:solidFill>
+            <a:srgbClr val="E2D8F6"/>
+          </a:solidFill>
+          <a:ln>
+            <a:noFill/>
+          </a:ln>
+        </p:spPr>
+        <p:txBody>
+          <a:bodyPr rtlCol="0" anchor="ctr"/>
+          <a:lstStyle/>
+          <a:p>
+            <a:pPr algn="ctr"/>
+          </a:p>
+        </p:txBody>
+      </p:sp>
+      <p:sp>
+        <p:nvSpPr>
+          <p:cNvPr id="8" name="Oval 7"/>
+          <p:cNvSpPr/>
+          <p:nvPr/>
+        </p:nvSpPr>
+        <p:spPr>
+          <a:xfrm>
+            <a:off x="2746800" y="435600"/>
+            <a:ext cx="36000" cy="36000"/>
+          </a:xfrm>
+          <a:prstGeom prst="ellipse">
+            <a:avLst/>
+          </a:prstGeom>
+          <a:solidFill>
+            <a:srgbClr val="7A2CF5"/>
+          </a:solidFill>
+          <a:ln>
+            <a:noFill/>
+          </a:ln>
+        </p:spPr>
+        <p:txBody>
+          <a:bodyPr rtlCol="0" anchor="ctr"/>
+          <a:lstStyle/>
+          <a:p>
+            <a:pPr algn="ctr"/>
+          </a:p>
+        </p:txBody>
+      </p:sp>
+      <p:sp>
+        <p:nvSpPr>
+          <p:cNvPr id="9" name="Oval 8"/>
+          <p:cNvSpPr/>
+          <p:nvPr/>
+        </p:nvSpPr>
+        <p:spPr>
+          <a:xfrm>
+            <a:off x="2746800" y="536400"/>
+            <a:ext cx="36000" cy="36000"/>
+          </a:xfrm>
+          <a:prstGeom prst="ellipse">
+            <a:avLst/>
+          </a:prstGeom>
+          <a:solidFill>
+            <a:srgbClr val="E2D8F6"/>
+          </a:solidFill>
+          <a:ln>
+            <a:noFill/>
+          </a:ln>
+        </p:spPr>
+        <p:txBody>
+          <a:bodyPr rtlCol="0" anchor="ctr"/>
+          <a:lstStyle/>
+          <a:p>
+            <a:pPr algn="ctr"/>
+          </a:p>
+        </p:txBody>
+      </p:sp>
+      <p:sp>
+        <p:nvSpPr>
+          <p:cNvPr id="10" name="Oval 9"/>
+          <p:cNvSpPr/>
+          <p:nvPr/>
+        </p:nvSpPr>
+        <p:spPr>
+          <a:xfrm>
+            <a:off x="2847600" y="234000"/>
+            <a:ext cx="36000" cy="36000"/>
+          </a:xfrm>
+          <a:prstGeom prst="ellipse">
+            <a:avLst/>
+          </a:prstGeom>
+          <a:solidFill>
+            <a:srgbClr val="E2D8F6"/>
+          </a:solidFill>
+          <a:ln>
+            <a:noFill/>
+          </a:ln>
+        </p:spPr>
+        <p:txBody>
+          <a:bodyPr rtlCol="0" anchor="ctr"/>
+          <a:lstStyle/>
+          <a:p>
+            <a:pPr algn="ctr"/>
+          </a:p>
+        </p:txBody>
+      </p:sp>
+      <p:sp>
+        <p:nvSpPr>
+          <p:cNvPr id="11" name="Oval 10"/>
+          <p:cNvSpPr/>
+          <p:nvPr/>
+        </p:nvSpPr>
+        <p:spPr>
+          <a:xfrm>
+            <a:off x="2847600" y="334800"/>
+            <a:ext cx="36000" cy="36000"/>
+          </a:xfrm>
+          <a:prstGeom prst="ellipse">
+            <a:avLst/>
+          </a:prstGeom>
+          <a:solidFill>
+            <a:srgbClr val="7A2CF5"/>
+          </a:solidFill>
+          <a:ln>
+            <a:noFill/>
+          </a:ln>
+        </p:spPr>
+        <p:txBody>
+          <a:bodyPr rtlCol="0" anchor="ctr"/>
+          <a:lstStyle/>
+          <a:p>
+            <a:pPr algn="ctr"/>
+          </a:p>
+        </p:txBody>
+      </p:sp>
+      <p:sp>
+        <p:nvSpPr>
+          <p:cNvPr id="12" name="Oval 11"/>
+          <p:cNvSpPr/>
+          <p:nvPr/>
+        </p:nvSpPr>
+        <p:spPr>
+          <a:xfrm>
+            <a:off x="2847600" y="435600"/>
+            <a:ext cx="36000" cy="36000"/>
+          </a:xfrm>
+          <a:prstGeom prst="ellipse">
+            <a:avLst/>
+          </a:prstGeom>
+          <a:solidFill>
+            <a:srgbClr val="E2D8F6"/>
+          </a:solidFill>
+          <a:ln>
+            <a:noFill/>
+          </a:ln>
+        </p:spPr>
+        <p:txBody>
+          <a:bodyPr rtlCol="0" anchor="ctr"/>
+          <a:lstStyle/>
+          <a:p>
+            <a:pPr algn="ctr"/>
+          </a:p>
+        </p:txBody>
+      </p:sp>
+      <p:sp>
+        <p:nvSpPr>
+          <p:cNvPr id="13" name="Oval 12"/>
+          <p:cNvSpPr/>
+          <p:nvPr/>
+        </p:nvSpPr>
+        <p:spPr>
+          <a:xfrm>
+            <a:off x="2847600" y="536400"/>
+            <a:ext cx="36000" cy="36000"/>
+          </a:xfrm>
+          <a:prstGeom prst="ellipse">
+            <a:avLst/>
+          </a:prstGeom>
+          <a:solidFill>
+            <a:srgbClr val="E2D8F6"/>
+          </a:solidFill>
+          <a:ln>
+            <a:noFill/>
+          </a:ln>
+        </p:spPr>
+        <p:txBody>
+          <a:bodyPr rtlCol="0" anchor="ctr"/>
+          <a:lstStyle/>
+          <a:p>
+            <a:pPr algn="ctr"/>
+          </a:p>
+        </p:txBody>
+      </p:sp>
+      <p:sp>
+        <p:nvSpPr>
+          <p:cNvPr id="14" name="Oval 13"/>
+          <p:cNvSpPr/>
+          <p:nvPr/>
+        </p:nvSpPr>
+        <p:spPr>
+          <a:xfrm>
+            <a:off x="2948400" y="234000"/>
+            <a:ext cx="36000" cy="36000"/>
+          </a:xfrm>
+          <a:prstGeom prst="ellipse">
+            <a:avLst/>
+          </a:prstGeom>
+          <a:solidFill>
+            <a:srgbClr val="7A2CF5"/>
+          </a:solidFill>
+          <a:ln>
+            <a:noFill/>
+          </a:ln>
+        </p:spPr>
+        <p:txBody>
+          <a:bodyPr rtlCol="0" anchor="ctr"/>
+          <a:lstStyle/>
+          <a:p>
+            <a:pPr algn="ctr"/>
+          </a:p>
+        </p:txBody>
+      </p:sp>
+      <p:sp>
+        <p:nvSpPr>
+          <p:cNvPr id="15" name="Oval 14"/>
+          <p:cNvSpPr/>
+          <p:nvPr/>
+        </p:nvSpPr>
+        <p:spPr>
+          <a:xfrm>
+            <a:off x="2948400" y="334800"/>
+            <a:ext cx="36000" cy="36000"/>
+          </a:xfrm>
+          <a:prstGeom prst="ellipse">
+            <a:avLst/>
+          </a:prstGeom>
+          <a:solidFill>
+            <a:srgbClr val="E2D8F6"/>
+          </a:solidFill>
+          <a:ln>
+            <a:noFill/>
+          </a:ln>
+        </p:spPr>
+        <p:txBody>
+          <a:bodyPr rtlCol="0" anchor="ctr"/>
+          <a:lstStyle/>
+          <a:p>
+            <a:pPr algn="ctr"/>
+          </a:p>
+        </p:txBody>
+      </p:sp>
+      <p:sp>
+        <p:nvSpPr>
+          <p:cNvPr id="16" name="Oval 15"/>
+          <p:cNvSpPr/>
+          <p:nvPr/>
+        </p:nvSpPr>
+        <p:spPr>
+          <a:xfrm>
+            <a:off x="2948400" y="435600"/>
+            <a:ext cx="36000" cy="36000"/>
+          </a:xfrm>
+          <a:prstGeom prst="ellipse">
+            <a:avLst/>
+          </a:prstGeom>
+          <a:solidFill>
+            <a:srgbClr val="E2D8F6"/>
+          </a:solidFill>
+          <a:ln>
+            <a:noFill/>
+          </a:ln>
+        </p:spPr>
+        <p:txBody>
+          <a:bodyPr rtlCol="0" anchor="ctr"/>
+          <a:lstStyle/>
+          <a:p>
+            <a:pPr algn="ctr"/>
+          </a:p>
+        </p:txBody>
+      </p:sp>
+      <p:sp>
+        <p:nvSpPr>
+          <p:cNvPr id="17" name="Oval 16"/>
+          <p:cNvSpPr/>
+          <p:nvPr/>
+        </p:nvSpPr>
+        <p:spPr>
+          <a:xfrm>
+            <a:off x="2948400" y="536400"/>
+            <a:ext cx="36000" cy="36000"/>
+          </a:xfrm>
+          <a:prstGeom prst="ellipse">
+            <a:avLst/>
+          </a:prstGeom>
+          <a:solidFill>
+            <a:srgbClr val="7A2CF5"/>
+          </a:solidFill>
+          <a:ln>
+            <a:noFill/>
+          </a:ln>
+        </p:spPr>
+        <p:txBody>
+          <a:bodyPr rtlCol="0" anchor="ctr"/>
+          <a:lstStyle/>
+          <a:p>
+            <a:pPr algn="ctr"/>
+          </a:p>
+        </p:txBody>
+      </p:sp>
+      <p:sp>
+        <p:nvSpPr>
+          <p:cNvPr id="18" name="Oval 17"/>
+          <p:cNvSpPr/>
+          <p:nvPr/>
+        </p:nvSpPr>
+        <p:spPr>
+          <a:xfrm>
+            <a:off x="3049200" y="234000"/>
+            <a:ext cx="36000" cy="36000"/>
+          </a:xfrm>
+          <a:prstGeom prst="ellipse">
+            <a:avLst/>
+          </a:prstGeom>
+          <a:solidFill>
+            <a:srgbClr val="E2D8F6"/>
+          </a:solidFill>
+          <a:ln>
+            <a:noFill/>
+          </a:ln>
+        </p:spPr>
+        <p:txBody>
+          <a:bodyPr rtlCol="0" anchor="ctr"/>
+          <a:lstStyle/>
+          <a:p>
+            <a:pPr algn="ctr"/>
+          </a:p>
+        </p:txBody>
+      </p:sp>
+      <p:sp>
+        <p:nvSpPr>
+          <p:cNvPr id="19" name="Oval 18"/>
+          <p:cNvSpPr/>
+          <p:nvPr/>
+        </p:nvSpPr>
+        <p:spPr>
+          <a:xfrm>
+            <a:off x="3049200" y="334800"/>
+            <a:ext cx="36000" cy="36000"/>
+          </a:xfrm>
+          <a:prstGeom prst="ellipse">
+            <a:avLst/>
+          </a:prstGeom>
+          <a:solidFill>
+            <a:srgbClr val="E2D8F6"/>
+          </a:solidFill>
+          <a:ln>
+            <a:noFill/>
+          </a:ln>
+        </p:spPr>
+        <p:txBody>
+          <a:bodyPr rtlCol="0" anchor="ctr"/>
+          <a:lstStyle/>
+          <a:p>
+            <a:pPr algn="ctr"/>
+          </a:p>
+        </p:txBody>
+      </p:sp>
+      <p:sp>
+        <p:nvSpPr>
+          <p:cNvPr id="20" name="Oval 19"/>
+          <p:cNvSpPr/>
+          <p:nvPr/>
+        </p:nvSpPr>
+        <p:spPr>
+          <a:xfrm>
+            <a:off x="3049200" y="435600"/>
+            <a:ext cx="36000" cy="36000"/>
+          </a:xfrm>
+          <a:prstGeom prst="ellipse">
+            <a:avLst/>
+          </a:prstGeom>
+          <a:solidFill>
+            <a:srgbClr val="7A2CF5"/>
+          </a:solidFill>
+          <a:ln>
+            <a:noFill/>
+          </a:ln>
+        </p:spPr>
+        <p:txBody>
+          <a:bodyPr rtlCol="0" anchor="ctr"/>
+          <a:lstStyle/>
+          <a:p>
+            <a:pPr algn="ctr"/>
+          </a:p>
+        </p:txBody>
+      </p:sp>
+      <p:sp>
+        <p:nvSpPr>
+          <p:cNvPr id="21" name="Oval 20"/>
+          <p:cNvSpPr/>
+          <p:nvPr/>
+        </p:nvSpPr>
+        <p:spPr>
+          <a:xfrm>
+            <a:off x="3049200" y="536400"/>
+            <a:ext cx="36000" cy="36000"/>
+          </a:xfrm>
+          <a:prstGeom prst="ellipse">
+            <a:avLst/>
+          </a:prstGeom>
+          <a:solidFill>
+            <a:srgbClr val="E2D8F6"/>
+          </a:solidFill>
+          <a:ln>
+            <a:noFill/>
+          </a:ln>
+        </p:spPr>
+        <p:txBody>
+          <a:bodyPr rtlCol="0" anchor="ctr"/>
+          <a:lstStyle/>
+          <a:p>
+            <a:pPr algn="ctr"/>
+          </a:p>
+        </p:txBody>
+      </p:sp>
+      <p:sp>
+        <p:nvSpPr>
+          <p:cNvPr id="22" name="텍스트"/>
           <p:cNvSpPr txBox="1"/>
           <p:nvPr/>
         </p:nvSpPr>
         <p:spPr>
           <a:xfrm>
-            <a:off x="360000" y="201600"/>
-            <a:ext cx="2520000" cy="100800"/>
+            <a:off x="252000" y="223200"/>
+            <a:ext cx="1440000" cy="133351"/>
           </a:xfrm>
           <a:prstGeom prst="rect">
             <a:avLst/>
@@ -3119,15 +3699,15 @@
           </a:bodyPr>
           <a:lstStyle/>
           <a:p>
-            <a:pPr algn="ctr">
+            <a:pPr algn="l">
               <a:lnSpc>
                 <a:spcPts val="1015"/>
               </a:lnSpc>
             </a:pPr>
             <a:r>
-              <a:rPr sz="700" b="1" spc="300">
+              <a:rPr sz="700" b="1" spc="200">
                 <a:solidFill>
-                  <a:srgbClr val="81704E"/>
+                  <a:srgbClr val="6B7280"/>
                 </a:solidFill>
                 <a:latin typeface="맑은 고딕"/>
                 <a:ea typeface="맑은 고딕"/>
@@ -3139,188 +3719,14 @@
       </p:sp>
       <p:sp>
         <p:nvSpPr>
-          <p:cNvPr id="3" name="Oval 2"/>
-          <p:cNvSpPr/>
-          <p:nvPr/>
-        </p:nvSpPr>
-        <p:spPr>
-          <a:xfrm>
-            <a:off x="1591920" y="404640"/>
-            <a:ext cx="56160" cy="95040"/>
-          </a:xfrm>
-          <a:prstGeom prst="ellipse">
-            <a:avLst/>
-          </a:prstGeom>
-          <a:solidFill>
-            <a:srgbClr val="3B8391"/>
-          </a:solidFill>
-          <a:ln>
-            <a:noFill/>
-          </a:ln>
-        </p:spPr>
-        <p:txBody>
-          <a:bodyPr rtlCol="0" anchor="ctr"/>
-          <a:lstStyle/>
-          <a:p>
-            <a:pPr algn="ctr"/>
-          </a:p>
-        </p:txBody>
-      </p:sp>
-      <p:sp>
-        <p:nvSpPr>
-          <p:cNvPr id="4" name="Oval 3"/>
-          <p:cNvSpPr/>
-          <p:nvPr/>
-        </p:nvSpPr>
-        <p:spPr>
-          <a:xfrm rot="4320000">
-            <a:off x="1641223" y="440461"/>
-            <a:ext cx="56160" cy="95040"/>
-          </a:xfrm>
-          <a:prstGeom prst="ellipse">
-            <a:avLst/>
-          </a:prstGeom>
-          <a:solidFill>
-            <a:srgbClr val="3B8391"/>
-          </a:solidFill>
-          <a:ln>
-            <a:noFill/>
-          </a:ln>
-        </p:spPr>
-        <p:txBody>
-          <a:bodyPr rtlCol="0" anchor="ctr"/>
-          <a:lstStyle/>
-          <a:p>
-            <a:pPr algn="ctr"/>
-          </a:p>
-        </p:txBody>
-      </p:sp>
-      <p:sp>
-        <p:nvSpPr>
-          <p:cNvPr id="5" name="Oval 4"/>
-          <p:cNvSpPr/>
-          <p:nvPr/>
-        </p:nvSpPr>
-        <p:spPr>
-          <a:xfrm rot="8640000">
-            <a:off x="1622391" y="498419"/>
-            <a:ext cx="56160" cy="95040"/>
-          </a:xfrm>
-          <a:prstGeom prst="ellipse">
-            <a:avLst/>
-          </a:prstGeom>
-          <a:solidFill>
-            <a:srgbClr val="3B8391"/>
-          </a:solidFill>
-          <a:ln>
-            <a:noFill/>
-          </a:ln>
-        </p:spPr>
-        <p:txBody>
-          <a:bodyPr rtlCol="0" anchor="ctr"/>
-          <a:lstStyle/>
-          <a:p>
-            <a:pPr algn="ctr"/>
-          </a:p>
-        </p:txBody>
-      </p:sp>
-      <p:sp>
-        <p:nvSpPr>
-          <p:cNvPr id="6" name="Oval 5"/>
-          <p:cNvSpPr/>
-          <p:nvPr/>
-        </p:nvSpPr>
-        <p:spPr>
-          <a:xfrm rot="12960000">
-            <a:off x="1561449" y="498419"/>
-            <a:ext cx="56160" cy="95040"/>
-          </a:xfrm>
-          <a:prstGeom prst="ellipse">
-            <a:avLst/>
-          </a:prstGeom>
-          <a:solidFill>
-            <a:srgbClr val="3B8391"/>
-          </a:solidFill>
-          <a:ln>
-            <a:noFill/>
-          </a:ln>
-        </p:spPr>
-        <p:txBody>
-          <a:bodyPr rtlCol="0" anchor="ctr"/>
-          <a:lstStyle/>
-          <a:p>
-            <a:pPr algn="ctr"/>
-          </a:p>
-        </p:txBody>
-      </p:sp>
-      <p:sp>
-        <p:nvSpPr>
-          <p:cNvPr id="7" name="Oval 6"/>
-          <p:cNvSpPr/>
-          <p:nvPr/>
-        </p:nvSpPr>
-        <p:spPr>
-          <a:xfrm rot="17280000">
-            <a:off x="1542617" y="440461"/>
-            <a:ext cx="56160" cy="95040"/>
-          </a:xfrm>
-          <a:prstGeom prst="ellipse">
-            <a:avLst/>
-          </a:prstGeom>
-          <a:solidFill>
-            <a:srgbClr val="3B8391"/>
-          </a:solidFill>
-          <a:ln>
-            <a:noFill/>
-          </a:ln>
-        </p:spPr>
-        <p:txBody>
-          <a:bodyPr rtlCol="0" anchor="ctr"/>
-          <a:lstStyle/>
-          <a:p>
-            <a:pPr algn="ctr"/>
-          </a:p>
-        </p:txBody>
-      </p:sp>
-      <p:sp>
-        <p:nvSpPr>
-          <p:cNvPr id="8" name="Oval 7"/>
-          <p:cNvSpPr/>
-          <p:nvPr/>
-        </p:nvSpPr>
-        <p:spPr>
-          <a:xfrm>
-            <a:off x="1596240" y="480240"/>
-            <a:ext cx="47520" cy="47520"/>
-          </a:xfrm>
-          <a:prstGeom prst="ellipse">
-            <a:avLst/>
-          </a:prstGeom>
-          <a:solidFill>
-            <a:srgbClr val="C8DCE0"/>
-          </a:solidFill>
-          <a:ln>
-            <a:noFill/>
-          </a:ln>
-        </p:spPr>
-        <p:txBody>
-          <a:bodyPr rtlCol="0" anchor="ctr"/>
-          <a:lstStyle/>
-          <a:p>
-            <a:pPr algn="ctr"/>
-          </a:p>
-        </p:txBody>
-      </p:sp>
-      <p:sp>
-        <p:nvSpPr>
-          <p:cNvPr id="9" name="텍스트"/>
+          <p:cNvPr id="23" name="텍스트"/>
           <p:cNvSpPr txBox="1"/>
           <p:nvPr/>
         </p:nvSpPr>
         <p:spPr>
           <a:xfrm>
-            <a:off x="360000" y="684000"/>
-            <a:ext cx="2520000" cy="313692"/>
+            <a:off x="252000" y="770400"/>
+            <a:ext cx="2016000" cy="360000"/>
           </a:xfrm>
           <a:prstGeom prst="rect">
             <a:avLst/>
@@ -3333,18 +3739,18 @@
           </a:bodyPr>
           <a:lstStyle/>
           <a:p>
-            <a:pPr algn="ctr">
+            <a:pPr algn="l">
               <a:lnSpc>
-                <a:spcPts val="2755"/>
+                <a:spcPts val="3190"/>
               </a:lnSpc>
             </a:pPr>
             <a:r>
-              <a:rPr sz="1900" b="1" spc="50">
+              <a:rPr sz="2200" b="1">
                 <a:solidFill>
-                  <a:srgbClr val="715214"/>
+                  <a:srgbClr val="12151C"/>
                 </a:solidFill>
-                <a:latin typeface="바탕"/>
-                <a:ea typeface="바탕"/>
+                <a:latin typeface="맑은 고딕"/>
+                <a:ea typeface="맑은 고딕"/>
               </a:rPr>
               <a:t>오지호</a:t>
             </a:r>
@@ -3353,14 +3759,14 @@
       </p:sp>
       <p:sp>
         <p:nvSpPr>
-          <p:cNvPr id="10" name="텍스트"/>
+          <p:cNvPr id="24" name="텍스트"/>
           <p:cNvSpPr txBox="1"/>
           <p:nvPr/>
         </p:nvSpPr>
         <p:spPr>
           <a:xfrm>
-            <a:off x="360000" y="1051200"/>
-            <a:ext cx="2520000" cy="122400"/>
+            <a:off x="252000" y="1173600"/>
+            <a:ext cx="2016000" cy="171451"/>
           </a:xfrm>
           <a:prstGeom prst="rect">
             <a:avLst/>
@@ -3373,15 +3779,15 @@
           </a:bodyPr>
           <a:lstStyle/>
           <a:p>
-            <a:pPr algn="ctr">
+            <a:pPr algn="l">
               <a:lnSpc>
-                <a:spcPts val="1232"/>
+                <a:spcPts val="1305"/>
               </a:lnSpc>
             </a:pPr>
             <a:r>
-              <a:rPr sz="850" b="1">
+              <a:rPr sz="900" b="0">
                 <a:solidFill>
-                  <a:srgbClr val="357682"/>
+                  <a:srgbClr val="6B7280"/>
                 </a:solidFill>
                 <a:latin typeface="맑은 고딕"/>
                 <a:ea typeface="맑은 고딕"/>
@@ -3393,43 +3799,14 @@
       </p:sp>
       <p:sp>
         <p:nvSpPr>
-          <p:cNvPr id="11" name="Rectangle 10"/>
-          <p:cNvSpPr/>
-          <p:nvPr/>
-        </p:nvSpPr>
-        <p:spPr>
-          <a:xfrm>
-            <a:off x="1512000" y="1245600"/>
-            <a:ext cx="216000" cy="10800"/>
-          </a:xfrm>
-          <a:prstGeom prst="rect">
-            <a:avLst/>
-          </a:prstGeom>
-          <a:solidFill>
-            <a:srgbClr val="3B8391"/>
-          </a:solidFill>
-          <a:ln>
-            <a:noFill/>
-          </a:ln>
-        </p:spPr>
-        <p:txBody>
-          <a:bodyPr rtlCol="0" anchor="ctr"/>
-          <a:lstStyle/>
-          <a:p>
-            <a:pPr algn="ctr"/>
-          </a:p>
-        </p:txBody>
-      </p:sp>
-      <p:sp>
-        <p:nvSpPr>
-          <p:cNvPr id="12" name="텍스트"/>
+          <p:cNvPr id="25" name="텍스트"/>
           <p:cNvSpPr txBox="1"/>
           <p:nvPr/>
         </p:nvSpPr>
         <p:spPr>
           <a:xfrm>
-            <a:off x="360000" y="1339200"/>
-            <a:ext cx="2520000" cy="108000"/>
+            <a:off x="1620000" y="1339200"/>
+            <a:ext cx="1368000" cy="133351"/>
           </a:xfrm>
           <a:prstGeom prst="rect">
             <a:avLst/>
@@ -3442,7 +3819,7 @@
           </a:bodyPr>
           <a:lstStyle/>
           <a:p>
-            <a:pPr algn="ctr">
+            <a:pPr algn="r">
               <a:lnSpc>
                 <a:spcPts val="1015"/>
               </a:lnSpc>
@@ -3450,26 +3827,26 @@
             <a:r>
               <a:rPr sz="700" b="0">
                 <a:solidFill>
-                  <a:srgbClr val="715214"/>
+                  <a:srgbClr val="12151C"/>
                 </a:solidFill>
                 <a:latin typeface="맑은 고딕"/>
                 <a:ea typeface="맑은 고딕"/>
               </a:rPr>
-              <a:t>010-1234-5678   ·   name@example.com</a:t>
-            </a:r>
-          </a:p>
-        </p:txBody>
-      </p:sp>
-      <p:sp>
-        <p:nvSpPr>
-          <p:cNvPr id="13" name="텍스트"/>
+              <a:t>010-1234-5678</a:t>
+            </a:r>
+          </a:p>
+        </p:txBody>
+      </p:sp>
+      <p:sp>
+        <p:nvSpPr>
+          <p:cNvPr id="26" name="텍스트"/>
           <p:cNvSpPr txBox="1"/>
           <p:nvPr/>
         </p:nvSpPr>
         <p:spPr>
           <a:xfrm>
-            <a:off x="360000" y="1468800"/>
-            <a:ext cx="2520000" cy="108000"/>
+            <a:off x="1620000" y="1476000"/>
+            <a:ext cx="1368000" cy="133351"/>
           </a:xfrm>
           <a:prstGeom prst="rect">
             <a:avLst/>
@@ -3482,7 +3859,7 @@
           </a:bodyPr>
           <a:lstStyle/>
           <a:p>
-            <a:pPr algn="ctr">
+            <a:pPr algn="r">
               <a:lnSpc>
                 <a:spcPts val="1015"/>
               </a:lnSpc>
@@ -3490,7 +3867,47 @@
             <a:r>
               <a:rPr sz="700" b="0">
                 <a:solidFill>
-                  <a:srgbClr val="81704E"/>
+                  <a:srgbClr val="12151C"/>
+                </a:solidFill>
+                <a:latin typeface="맑은 고딕"/>
+                <a:ea typeface="맑은 고딕"/>
+              </a:rPr>
+              <a:t>name@example.com</a:t>
+            </a:r>
+          </a:p>
+        </p:txBody>
+      </p:sp>
+      <p:sp>
+        <p:nvSpPr>
+          <p:cNvPr id="27" name="텍스트"/>
+          <p:cNvSpPr txBox="1"/>
+          <p:nvPr/>
+        </p:nvSpPr>
+        <p:spPr>
+          <a:xfrm>
+            <a:off x="1620000" y="1612800"/>
+            <a:ext cx="1368000" cy="133351"/>
+          </a:xfrm>
+          <a:prstGeom prst="rect">
+            <a:avLst/>
+          </a:prstGeom>
+          <a:noFill/>
+        </p:spPr>
+        <p:txBody>
+          <a:bodyPr wrap="square" lIns="0" rIns="0" tIns="0" bIns="0" anchor="t">
+            <a:spAutoFit/>
+          </a:bodyPr>
+          <a:lstStyle/>
+          <a:p>
+            <a:pPr algn="r">
+              <a:lnSpc>
+                <a:spcPts val="1015"/>
+              </a:lnSpc>
+            </a:pPr>
+            <a:r>
+              <a:rPr sz="700" b="0">
+                <a:solidFill>
+                  <a:srgbClr val="12151C"/>
                 </a:solidFill>
                 <a:latin typeface="맑은 고딕"/>
                 <a:ea typeface="맑은 고딕"/>
@@ -3514,7 +3931,7 @@
     <p:bg>
       <p:bgPr>
         <a:solidFill>
-          <a:srgbClr val="715214"/>
+          <a:srgbClr val="0E1116"/>
         </a:solidFill>
         <a:effectLst/>
       </p:bgPr>
@@ -3535,13 +3952,13 @@
         <p:spPr>
           <a:xfrm>
             <a:off x="0" y="0"/>
-            <a:ext cx="64800" cy="1800000"/>
+            <a:ext cx="3240000" cy="1800000"/>
           </a:xfrm>
           <a:prstGeom prst="rect">
             <a:avLst/>
           </a:prstGeom>
           <a:solidFill>
-            <a:srgbClr val="D7B061"/>
+            <a:srgbClr val="985BF7"/>
           </a:solidFill>
           <a:ln>
             <a:noFill/>
@@ -3557,14 +3974,130 @@
       </p:sp>
       <p:sp>
         <p:nvSpPr>
-          <p:cNvPr id="3" name="텍스트"/>
+          <p:cNvPr id="3" name="Freeform 2"/>
+          <p:cNvSpPr/>
+          <p:nvPr/>
+        </p:nvSpPr>
+        <p:spPr>
+          <a:xfrm>
+            <a:off x="2412000" y="972000"/>
+            <a:ext cx="828000" cy="828000"/>
+          </a:xfrm>
+          <a:custGeom>
+            <a:avLst/>
+            <a:gdLst/>
+            <a:ahLst/>
+            <a:cxnLst/>
+            <a:rect l="l" t="t" r="r" b="b"/>
+            <a:pathLst>
+              <a:path w="828000" h="828000">
+                <a:moveTo>
+                  <a:pt x="828000" y="828000"/>
+                </a:moveTo>
+                <a:lnTo>
+                  <a:pt x="0" y="828000"/>
+                </a:lnTo>
+                <a:lnTo>
+                  <a:pt x="1773" y="773846"/>
+                </a:lnTo>
+                <a:lnTo>
+                  <a:pt x="7084" y="719924"/>
+                </a:lnTo>
+                <a:lnTo>
+                  <a:pt x="15910" y="666465"/>
+                </a:lnTo>
+                <a:lnTo>
+                  <a:pt x="28213" y="613698"/>
+                </a:lnTo>
+                <a:lnTo>
+                  <a:pt x="43942" y="561848"/>
+                </a:lnTo>
+                <a:lnTo>
+                  <a:pt x="63028" y="511138"/>
+                </a:lnTo>
+                <a:lnTo>
+                  <a:pt x="85389" y="461785"/>
+                </a:lnTo>
+                <a:lnTo>
+                  <a:pt x="110931" y="414000"/>
+                </a:lnTo>
+                <a:lnTo>
+                  <a:pt x="139543" y="367988"/>
+                </a:lnTo>
+                <a:lnTo>
+                  <a:pt x="171103" y="323946"/>
+                </a:lnTo>
+                <a:lnTo>
+                  <a:pt x="205477" y="282062"/>
+                </a:lnTo>
+                <a:lnTo>
+                  <a:pt x="242516" y="242516"/>
+                </a:lnTo>
+                <a:lnTo>
+                  <a:pt x="282062" y="205477"/>
+                </a:lnTo>
+                <a:lnTo>
+                  <a:pt x="323946" y="171103"/>
+                </a:lnTo>
+                <a:lnTo>
+                  <a:pt x="367988" y="139543"/>
+                </a:lnTo>
+                <a:lnTo>
+                  <a:pt x="414000" y="110931"/>
+                </a:lnTo>
+                <a:lnTo>
+                  <a:pt x="461785" y="85389"/>
+                </a:lnTo>
+                <a:lnTo>
+                  <a:pt x="511138" y="63028"/>
+                </a:lnTo>
+                <a:lnTo>
+                  <a:pt x="561848" y="43942"/>
+                </a:lnTo>
+                <a:lnTo>
+                  <a:pt x="613698" y="28213"/>
+                </a:lnTo>
+                <a:lnTo>
+                  <a:pt x="666465" y="15910"/>
+                </a:lnTo>
+                <a:lnTo>
+                  <a:pt x="719924" y="7084"/>
+                </a:lnTo>
+                <a:lnTo>
+                  <a:pt x="773846" y="1773"/>
+                </a:lnTo>
+                <a:lnTo>
+                  <a:pt x="828000" y="0"/>
+                </a:lnTo>
+                <a:close/>
+              </a:path>
+            </a:pathLst>
+          </a:custGeom>
+          <a:solidFill>
+            <a:srgbClr val="AF7FF9"/>
+          </a:solidFill>
+          <a:ln>
+            <a:noFill/>
+          </a:ln>
+        </p:spPr>
+        <p:txBody>
+          <a:bodyPr rtlCol="0" anchor="ctr"/>
+          <a:lstStyle/>
+          <a:p>
+            <a:pPr algn="ctr"/>
+          </a:p>
+        </p:txBody>
+      </p:sp>
+      <p:sp>
+        <p:nvSpPr>
+          <p:cNvPr id="4" name="텍스트"/>
           <p:cNvSpPr txBox="1"/>
           <p:nvPr/>
         </p:nvSpPr>
         <p:spPr>
           <a:xfrm>
             <a:off x="252000" y="432000"/>
-            <a:ext cx="2016000" cy="252000"/>
+            <a:ext cx="2304000" cy="720000"/>
           </a:xfrm>
           <a:prstGeom prst="rect">
             <a:avLst/>
@@ -3579,32 +4112,32 @@
           <a:p>
             <a:pPr algn="l">
               <a:lnSpc>
-                <a:spcPts val="2465"/>
+                <a:spcPts val="1884"/>
               </a:lnSpc>
             </a:pPr>
             <a:r>
-              <a:rPr sz="1700" b="1">
+              <a:rPr sz="1300" b="1">
                 <a:solidFill>
                   <a:srgbClr val="FFFFFF"/>
                 </a:solidFill>
-                <a:latin typeface="바탕"/>
-                <a:ea typeface="바탕"/>
+                <a:latin typeface="맑은 고딕"/>
+                <a:ea typeface="맑은 고딕"/>
               </a:rPr>
-              <a:t>상호명</a:t>
-            </a:r>
-          </a:p>
-        </p:txBody>
-      </p:sp>
-      <p:sp>
-        <p:nvSpPr>
-          <p:cNvPr id="4" name="텍스트"/>
+              <a:t>믿고 맡기는 동네 가게</a:t>
+            </a:r>
+          </a:p>
+        </p:txBody>
+      </p:sp>
+      <p:sp>
+        <p:nvSpPr>
+          <p:cNvPr id="5" name="텍스트"/>
           <p:cNvSpPr txBox="1"/>
           <p:nvPr/>
         </p:nvSpPr>
         <p:spPr>
           <a:xfrm>
-            <a:off x="252000" y="878400"/>
-            <a:ext cx="2016000" cy="540000"/>
+            <a:off x="252000" y="1476000"/>
+            <a:ext cx="1800000" cy="133351"/>
           </a:xfrm>
           <a:prstGeom prst="rect">
             <a:avLst/>
@@ -3619,292 +4152,19 @@
           <a:p>
             <a:pPr algn="l">
               <a:lnSpc>
-                <a:spcPts val="1232"/>
+                <a:spcPts val="1015"/>
               </a:lnSpc>
             </a:pPr>
             <a:r>
-              <a:rPr sz="850" b="0">
+              <a:rPr sz="700" b="1" spc="200">
                 <a:solidFill>
-                  <a:srgbClr val="D7CEBD"/>
-                </a:solidFill>
-                <a:latin typeface="바탕"/>
-                <a:ea typeface="바탕"/>
-              </a:rPr>
-              <a:t>믿고 맡기는 동네 가게</a:t>
-            </a:r>
-          </a:p>
-        </p:txBody>
-      </p:sp>
-      <p:sp>
-        <p:nvSpPr>
-          <p:cNvPr id="5" name="Rectangle 4"/>
-          <p:cNvSpPr/>
-          <p:nvPr/>
-        </p:nvSpPr>
-        <p:spPr>
-          <a:xfrm>
-            <a:off x="2520000" y="1080000"/>
-            <a:ext cx="504000" cy="504000"/>
-          </a:xfrm>
-          <a:prstGeom prst="rect">
-            <a:avLst/>
-          </a:prstGeom>
-          <a:noFill/>
-          <a:ln w="9000">
-            <a:solidFill>
-              <a:srgbClr val="D7B061"/>
-            </a:solidFill>
-            <a:prstDash val="dash"/>
-          </a:ln>
-        </p:spPr>
-        <p:txBody>
-          <a:bodyPr rtlCol="0" anchor="ctr"/>
-          <a:lstStyle/>
-          <a:p>
-            <a:pPr algn="ctr"/>
-          </a:p>
-        </p:txBody>
-      </p:sp>
-      <p:sp>
-        <p:nvSpPr>
-          <p:cNvPr id="6" name="텍스트"/>
-          <p:cNvSpPr txBox="1"/>
-          <p:nvPr/>
-        </p:nvSpPr>
-        <p:spPr>
-          <a:xfrm>
-            <a:off x="2520000" y="1080000"/>
-            <a:ext cx="504000" cy="504000"/>
-          </a:xfrm>
-          <a:prstGeom prst="rect">
-            <a:avLst/>
-          </a:prstGeom>
-          <a:noFill/>
-        </p:spPr>
-        <p:txBody>
-          <a:bodyPr wrap="square" lIns="0" rIns="0" tIns="0" bIns="0" anchor="ctr">
-            <a:spAutoFit/>
-          </a:bodyPr>
-          <a:lstStyle/>
-          <a:p>
-            <a:pPr algn="ctr">
-              <a:lnSpc>
-                <a:spcPts val="1305"/>
-              </a:lnSpc>
-            </a:pPr>
-            <a:r>
-              <a:rPr sz="900" b="1">
-                <a:solidFill>
-                  <a:srgbClr val="D7CEBD"/>
+                  <a:srgbClr val="FFFFFF"/>
                 </a:solidFill>
                 <a:latin typeface="맑은 고딕"/>
                 <a:ea typeface="맑은 고딕"/>
               </a:rPr>
-              <a:t>QR</a:t>
-            </a:r>
-          </a:p>
-        </p:txBody>
-      </p:sp>
-      <p:sp>
-        <p:nvSpPr>
-          <p:cNvPr id="7" name="Rectangle 6"/>
-          <p:cNvSpPr/>
-          <p:nvPr/>
-        </p:nvSpPr>
-        <p:spPr>
-          <a:xfrm>
-            <a:off x="252000" y="763200"/>
-            <a:ext cx="201600" cy="14400"/>
-          </a:xfrm>
-          <a:prstGeom prst="rect">
-            <a:avLst/>
-          </a:prstGeom>
-          <a:solidFill>
-            <a:srgbClr val="D7B061"/>
-          </a:solidFill>
-          <a:ln>
-            <a:noFill/>
-          </a:ln>
-        </p:spPr>
-        <p:txBody>
-          <a:bodyPr rtlCol="0" anchor="ctr"/>
-          <a:lstStyle/>
-          <a:p>
-            <a:pPr algn="ctr"/>
-          </a:p>
-        </p:txBody>
-      </p:sp>
-      <p:sp>
-        <p:nvSpPr>
-          <p:cNvPr id="8" name="Oval 7"/>
-          <p:cNvSpPr/>
-          <p:nvPr/>
-        </p:nvSpPr>
-        <p:spPr>
-          <a:xfrm>
-            <a:off x="2729880" y="282960"/>
-            <a:ext cx="84240" cy="142560"/>
-          </a:xfrm>
-          <a:prstGeom prst="ellipse">
-            <a:avLst/>
-          </a:prstGeom>
-          <a:solidFill>
-            <a:srgbClr val="D7B061"/>
-          </a:solidFill>
-          <a:ln>
-            <a:noFill/>
-          </a:ln>
-        </p:spPr>
-        <p:txBody>
-          <a:bodyPr rtlCol="0" anchor="ctr"/>
-          <a:lstStyle/>
-          <a:p>
-            <a:pPr algn="ctr"/>
-          </a:p>
-        </p:txBody>
-      </p:sp>
-      <p:sp>
-        <p:nvSpPr>
-          <p:cNvPr id="9" name="Oval 8"/>
-          <p:cNvSpPr/>
-          <p:nvPr/>
-        </p:nvSpPr>
-        <p:spPr>
-          <a:xfrm rot="4320000">
-            <a:off x="2803834" y="336691"/>
-            <a:ext cx="84240" cy="142560"/>
-          </a:xfrm>
-          <a:prstGeom prst="ellipse">
-            <a:avLst/>
-          </a:prstGeom>
-          <a:solidFill>
-            <a:srgbClr val="D7B061"/>
-          </a:solidFill>
-          <a:ln>
-            <a:noFill/>
-          </a:ln>
-        </p:spPr>
-        <p:txBody>
-          <a:bodyPr rtlCol="0" anchor="ctr"/>
-          <a:lstStyle/>
-          <a:p>
-            <a:pPr algn="ctr"/>
-          </a:p>
-        </p:txBody>
-      </p:sp>
-      <p:sp>
-        <p:nvSpPr>
-          <p:cNvPr id="10" name="Oval 9"/>
-          <p:cNvSpPr/>
-          <p:nvPr/>
-        </p:nvSpPr>
-        <p:spPr>
-          <a:xfrm rot="8640000">
-            <a:off x="2775586" y="423629"/>
-            <a:ext cx="84240" cy="142560"/>
-          </a:xfrm>
-          <a:prstGeom prst="ellipse">
-            <a:avLst/>
-          </a:prstGeom>
-          <a:solidFill>
-            <a:srgbClr val="D7B061"/>
-          </a:solidFill>
-          <a:ln>
-            <a:noFill/>
-          </a:ln>
-        </p:spPr>
-        <p:txBody>
-          <a:bodyPr rtlCol="0" anchor="ctr"/>
-          <a:lstStyle/>
-          <a:p>
-            <a:pPr algn="ctr"/>
-          </a:p>
-        </p:txBody>
-      </p:sp>
-      <p:sp>
-        <p:nvSpPr>
-          <p:cNvPr id="11" name="Oval 10"/>
-          <p:cNvSpPr/>
-          <p:nvPr/>
-        </p:nvSpPr>
-        <p:spPr>
-          <a:xfrm rot="12960000">
-            <a:off x="2684174" y="423629"/>
-            <a:ext cx="84240" cy="142560"/>
-          </a:xfrm>
-          <a:prstGeom prst="ellipse">
-            <a:avLst/>
-          </a:prstGeom>
-          <a:solidFill>
-            <a:srgbClr val="D7B061"/>
-          </a:solidFill>
-          <a:ln>
-            <a:noFill/>
-          </a:ln>
-        </p:spPr>
-        <p:txBody>
-          <a:bodyPr rtlCol="0" anchor="ctr"/>
-          <a:lstStyle/>
-          <a:p>
-            <a:pPr algn="ctr"/>
-          </a:p>
-        </p:txBody>
-      </p:sp>
-      <p:sp>
-        <p:nvSpPr>
-          <p:cNvPr id="12" name="Oval 11"/>
-          <p:cNvSpPr/>
-          <p:nvPr/>
-        </p:nvSpPr>
-        <p:spPr>
-          <a:xfrm rot="17280000">
-            <a:off x="2655926" y="336691"/>
-            <a:ext cx="84240" cy="142560"/>
-          </a:xfrm>
-          <a:prstGeom prst="ellipse">
-            <a:avLst/>
-          </a:prstGeom>
-          <a:solidFill>
-            <a:srgbClr val="D7B061"/>
-          </a:solidFill>
-          <a:ln>
-            <a:noFill/>
-          </a:ln>
-        </p:spPr>
-        <p:txBody>
-          <a:bodyPr rtlCol="0" anchor="ctr"/>
-          <a:lstStyle/>
-          <a:p>
-            <a:pPr algn="ctr"/>
-          </a:p>
-        </p:txBody>
-      </p:sp>
-      <p:sp>
-        <p:nvSpPr>
-          <p:cNvPr id="13" name="Oval 12"/>
-          <p:cNvSpPr/>
-          <p:nvPr/>
-        </p:nvSpPr>
-        <p:spPr>
-          <a:xfrm>
-            <a:off x="2736360" y="396360"/>
-            <a:ext cx="71280" cy="71280"/>
-          </a:xfrm>
-          <a:prstGeom prst="ellipse">
-            <a:avLst/>
-          </a:prstGeom>
-          <a:solidFill>
-            <a:srgbClr val="886E3A"/>
-          </a:solidFill>
-          <a:ln>
-            <a:noFill/>
-          </a:ln>
-        </p:spPr>
-        <p:txBody>
-          <a:bodyPr rtlCol="0" anchor="ctr"/>
-          <a:lstStyle/>
-          <a:p>
-            <a:pPr algn="ctr"/>
+              <a:t>상호명</a:t>
+            </a:r>
           </a:p>
         </p:txBody>
       </p:sp>

--- a/public/fun/cards/life/life-12.pptx
+++ b/public/fun/cards/life/life-12.pptx
@@ -3099,16 +3099,45 @@
       <p:grpSpPr/>
       <p:sp>
         <p:nvSpPr>
-          <p:cNvPr id="2" name="Oval 1"/>
+          <p:cNvPr id="2" name="Rectangle 1"/>
           <p:cNvSpPr/>
           <p:nvPr/>
         </p:nvSpPr>
         <p:spPr>
           <a:xfrm>
-            <a:off x="2646000" y="234000"/>
-            <a:ext cx="36000" cy="36000"/>
-          </a:xfrm>
-          <a:prstGeom prst="ellipse">
+            <a:off x="0" y="1296000"/>
+            <a:ext cx="3240000" cy="504000"/>
+          </a:xfrm>
+          <a:prstGeom prst="rect">
+            <a:avLst/>
+          </a:prstGeom>
+          <a:solidFill>
+            <a:srgbClr val="E2D8F6"/>
+          </a:solidFill>
+          <a:ln>
+            <a:noFill/>
+          </a:ln>
+        </p:spPr>
+        <p:txBody>
+          <a:bodyPr rtlCol="0" anchor="ctr"/>
+          <a:lstStyle/>
+          <a:p>
+            <a:pPr algn="ctr"/>
+          </a:p>
+        </p:txBody>
+      </p:sp>
+      <p:sp>
+        <p:nvSpPr>
+          <p:cNvPr id="3" name="Rectangle 2"/>
+          <p:cNvSpPr/>
+          <p:nvPr/>
+        </p:nvSpPr>
+        <p:spPr>
+          <a:xfrm>
+            <a:off x="0" y="1296000"/>
+            <a:ext cx="3240000" cy="14400"/>
+          </a:xfrm>
+          <a:prstGeom prst="rect">
             <a:avLst/>
           </a:prstGeom>
           <a:solidFill>
@@ -3128,565 +3157,14 @@
       </p:sp>
       <p:sp>
         <p:nvSpPr>
-          <p:cNvPr id="3" name="Oval 2"/>
-          <p:cNvSpPr/>
-          <p:nvPr/>
-        </p:nvSpPr>
-        <p:spPr>
-          <a:xfrm>
-            <a:off x="2646000" y="334800"/>
-            <a:ext cx="36000" cy="36000"/>
-          </a:xfrm>
-          <a:prstGeom prst="ellipse">
-            <a:avLst/>
-          </a:prstGeom>
-          <a:solidFill>
-            <a:srgbClr val="E2D8F6"/>
-          </a:solidFill>
-          <a:ln>
-            <a:noFill/>
-          </a:ln>
-        </p:spPr>
-        <p:txBody>
-          <a:bodyPr rtlCol="0" anchor="ctr"/>
-          <a:lstStyle/>
-          <a:p>
-            <a:pPr algn="ctr"/>
-          </a:p>
-        </p:txBody>
-      </p:sp>
-      <p:sp>
-        <p:nvSpPr>
-          <p:cNvPr id="4" name="Oval 3"/>
-          <p:cNvSpPr/>
-          <p:nvPr/>
-        </p:nvSpPr>
-        <p:spPr>
-          <a:xfrm>
-            <a:off x="2646000" y="435600"/>
-            <a:ext cx="36000" cy="36000"/>
-          </a:xfrm>
-          <a:prstGeom prst="ellipse">
-            <a:avLst/>
-          </a:prstGeom>
-          <a:solidFill>
-            <a:srgbClr val="E2D8F6"/>
-          </a:solidFill>
-          <a:ln>
-            <a:noFill/>
-          </a:ln>
-        </p:spPr>
-        <p:txBody>
-          <a:bodyPr rtlCol="0" anchor="ctr"/>
-          <a:lstStyle/>
-          <a:p>
-            <a:pPr algn="ctr"/>
-          </a:p>
-        </p:txBody>
-      </p:sp>
-      <p:sp>
-        <p:nvSpPr>
-          <p:cNvPr id="5" name="Oval 4"/>
-          <p:cNvSpPr/>
-          <p:nvPr/>
-        </p:nvSpPr>
-        <p:spPr>
-          <a:xfrm>
-            <a:off x="2646000" y="536400"/>
-            <a:ext cx="36000" cy="36000"/>
-          </a:xfrm>
-          <a:prstGeom prst="ellipse">
-            <a:avLst/>
-          </a:prstGeom>
-          <a:solidFill>
-            <a:srgbClr val="7A2CF5"/>
-          </a:solidFill>
-          <a:ln>
-            <a:noFill/>
-          </a:ln>
-        </p:spPr>
-        <p:txBody>
-          <a:bodyPr rtlCol="0" anchor="ctr"/>
-          <a:lstStyle/>
-          <a:p>
-            <a:pPr algn="ctr"/>
-          </a:p>
-        </p:txBody>
-      </p:sp>
-      <p:sp>
-        <p:nvSpPr>
-          <p:cNvPr id="6" name="Oval 5"/>
-          <p:cNvSpPr/>
-          <p:nvPr/>
-        </p:nvSpPr>
-        <p:spPr>
-          <a:xfrm>
-            <a:off x="2746800" y="234000"/>
-            <a:ext cx="36000" cy="36000"/>
-          </a:xfrm>
-          <a:prstGeom prst="ellipse">
-            <a:avLst/>
-          </a:prstGeom>
-          <a:solidFill>
-            <a:srgbClr val="E2D8F6"/>
-          </a:solidFill>
-          <a:ln>
-            <a:noFill/>
-          </a:ln>
-        </p:spPr>
-        <p:txBody>
-          <a:bodyPr rtlCol="0" anchor="ctr"/>
-          <a:lstStyle/>
-          <a:p>
-            <a:pPr algn="ctr"/>
-          </a:p>
-        </p:txBody>
-      </p:sp>
-      <p:sp>
-        <p:nvSpPr>
-          <p:cNvPr id="7" name="Oval 6"/>
-          <p:cNvSpPr/>
-          <p:nvPr/>
-        </p:nvSpPr>
-        <p:spPr>
-          <a:xfrm>
-            <a:off x="2746800" y="334800"/>
-            <a:ext cx="36000" cy="36000"/>
-          </a:xfrm>
-          <a:prstGeom prst="ellipse">
-            <a:avLst/>
-          </a:prstGeom>
-          <a:solidFill>
-            <a:srgbClr val="E2D8F6"/>
-          </a:solidFill>
-          <a:ln>
-            <a:noFill/>
-          </a:ln>
-        </p:spPr>
-        <p:txBody>
-          <a:bodyPr rtlCol="0" anchor="ctr"/>
-          <a:lstStyle/>
-          <a:p>
-            <a:pPr algn="ctr"/>
-          </a:p>
-        </p:txBody>
-      </p:sp>
-      <p:sp>
-        <p:nvSpPr>
-          <p:cNvPr id="8" name="Oval 7"/>
-          <p:cNvSpPr/>
-          <p:nvPr/>
-        </p:nvSpPr>
-        <p:spPr>
-          <a:xfrm>
-            <a:off x="2746800" y="435600"/>
-            <a:ext cx="36000" cy="36000"/>
-          </a:xfrm>
-          <a:prstGeom prst="ellipse">
-            <a:avLst/>
-          </a:prstGeom>
-          <a:solidFill>
-            <a:srgbClr val="7A2CF5"/>
-          </a:solidFill>
-          <a:ln>
-            <a:noFill/>
-          </a:ln>
-        </p:spPr>
-        <p:txBody>
-          <a:bodyPr rtlCol="0" anchor="ctr"/>
-          <a:lstStyle/>
-          <a:p>
-            <a:pPr algn="ctr"/>
-          </a:p>
-        </p:txBody>
-      </p:sp>
-      <p:sp>
-        <p:nvSpPr>
-          <p:cNvPr id="9" name="Oval 8"/>
-          <p:cNvSpPr/>
-          <p:nvPr/>
-        </p:nvSpPr>
-        <p:spPr>
-          <a:xfrm>
-            <a:off x="2746800" y="536400"/>
-            <a:ext cx="36000" cy="36000"/>
-          </a:xfrm>
-          <a:prstGeom prst="ellipse">
-            <a:avLst/>
-          </a:prstGeom>
-          <a:solidFill>
-            <a:srgbClr val="E2D8F6"/>
-          </a:solidFill>
-          <a:ln>
-            <a:noFill/>
-          </a:ln>
-        </p:spPr>
-        <p:txBody>
-          <a:bodyPr rtlCol="0" anchor="ctr"/>
-          <a:lstStyle/>
-          <a:p>
-            <a:pPr algn="ctr"/>
-          </a:p>
-        </p:txBody>
-      </p:sp>
-      <p:sp>
-        <p:nvSpPr>
-          <p:cNvPr id="10" name="Oval 9"/>
-          <p:cNvSpPr/>
-          <p:nvPr/>
-        </p:nvSpPr>
-        <p:spPr>
-          <a:xfrm>
-            <a:off x="2847600" y="234000"/>
-            <a:ext cx="36000" cy="36000"/>
-          </a:xfrm>
-          <a:prstGeom prst="ellipse">
-            <a:avLst/>
-          </a:prstGeom>
-          <a:solidFill>
-            <a:srgbClr val="E2D8F6"/>
-          </a:solidFill>
-          <a:ln>
-            <a:noFill/>
-          </a:ln>
-        </p:spPr>
-        <p:txBody>
-          <a:bodyPr rtlCol="0" anchor="ctr"/>
-          <a:lstStyle/>
-          <a:p>
-            <a:pPr algn="ctr"/>
-          </a:p>
-        </p:txBody>
-      </p:sp>
-      <p:sp>
-        <p:nvSpPr>
-          <p:cNvPr id="11" name="Oval 10"/>
-          <p:cNvSpPr/>
-          <p:nvPr/>
-        </p:nvSpPr>
-        <p:spPr>
-          <a:xfrm>
-            <a:off x="2847600" y="334800"/>
-            <a:ext cx="36000" cy="36000"/>
-          </a:xfrm>
-          <a:prstGeom prst="ellipse">
-            <a:avLst/>
-          </a:prstGeom>
-          <a:solidFill>
-            <a:srgbClr val="7A2CF5"/>
-          </a:solidFill>
-          <a:ln>
-            <a:noFill/>
-          </a:ln>
-        </p:spPr>
-        <p:txBody>
-          <a:bodyPr rtlCol="0" anchor="ctr"/>
-          <a:lstStyle/>
-          <a:p>
-            <a:pPr algn="ctr"/>
-          </a:p>
-        </p:txBody>
-      </p:sp>
-      <p:sp>
-        <p:nvSpPr>
-          <p:cNvPr id="12" name="Oval 11"/>
-          <p:cNvSpPr/>
-          <p:nvPr/>
-        </p:nvSpPr>
-        <p:spPr>
-          <a:xfrm>
-            <a:off x="2847600" y="435600"/>
-            <a:ext cx="36000" cy="36000"/>
-          </a:xfrm>
-          <a:prstGeom prst="ellipse">
-            <a:avLst/>
-          </a:prstGeom>
-          <a:solidFill>
-            <a:srgbClr val="E2D8F6"/>
-          </a:solidFill>
-          <a:ln>
-            <a:noFill/>
-          </a:ln>
-        </p:spPr>
-        <p:txBody>
-          <a:bodyPr rtlCol="0" anchor="ctr"/>
-          <a:lstStyle/>
-          <a:p>
-            <a:pPr algn="ctr"/>
-          </a:p>
-        </p:txBody>
-      </p:sp>
-      <p:sp>
-        <p:nvSpPr>
-          <p:cNvPr id="13" name="Oval 12"/>
-          <p:cNvSpPr/>
-          <p:nvPr/>
-        </p:nvSpPr>
-        <p:spPr>
-          <a:xfrm>
-            <a:off x="2847600" y="536400"/>
-            <a:ext cx="36000" cy="36000"/>
-          </a:xfrm>
-          <a:prstGeom prst="ellipse">
-            <a:avLst/>
-          </a:prstGeom>
-          <a:solidFill>
-            <a:srgbClr val="E2D8F6"/>
-          </a:solidFill>
-          <a:ln>
-            <a:noFill/>
-          </a:ln>
-        </p:spPr>
-        <p:txBody>
-          <a:bodyPr rtlCol="0" anchor="ctr"/>
-          <a:lstStyle/>
-          <a:p>
-            <a:pPr algn="ctr"/>
-          </a:p>
-        </p:txBody>
-      </p:sp>
-      <p:sp>
-        <p:nvSpPr>
-          <p:cNvPr id="14" name="Oval 13"/>
-          <p:cNvSpPr/>
-          <p:nvPr/>
-        </p:nvSpPr>
-        <p:spPr>
-          <a:xfrm>
-            <a:off x="2948400" y="234000"/>
-            <a:ext cx="36000" cy="36000"/>
-          </a:xfrm>
-          <a:prstGeom prst="ellipse">
-            <a:avLst/>
-          </a:prstGeom>
-          <a:solidFill>
-            <a:srgbClr val="7A2CF5"/>
-          </a:solidFill>
-          <a:ln>
-            <a:noFill/>
-          </a:ln>
-        </p:spPr>
-        <p:txBody>
-          <a:bodyPr rtlCol="0" anchor="ctr"/>
-          <a:lstStyle/>
-          <a:p>
-            <a:pPr algn="ctr"/>
-          </a:p>
-        </p:txBody>
-      </p:sp>
-      <p:sp>
-        <p:nvSpPr>
-          <p:cNvPr id="15" name="Oval 14"/>
-          <p:cNvSpPr/>
-          <p:nvPr/>
-        </p:nvSpPr>
-        <p:spPr>
-          <a:xfrm>
-            <a:off x="2948400" y="334800"/>
-            <a:ext cx="36000" cy="36000"/>
-          </a:xfrm>
-          <a:prstGeom prst="ellipse">
-            <a:avLst/>
-          </a:prstGeom>
-          <a:solidFill>
-            <a:srgbClr val="E2D8F6"/>
-          </a:solidFill>
-          <a:ln>
-            <a:noFill/>
-          </a:ln>
-        </p:spPr>
-        <p:txBody>
-          <a:bodyPr rtlCol="0" anchor="ctr"/>
-          <a:lstStyle/>
-          <a:p>
-            <a:pPr algn="ctr"/>
-          </a:p>
-        </p:txBody>
-      </p:sp>
-      <p:sp>
-        <p:nvSpPr>
-          <p:cNvPr id="16" name="Oval 15"/>
-          <p:cNvSpPr/>
-          <p:nvPr/>
-        </p:nvSpPr>
-        <p:spPr>
-          <a:xfrm>
-            <a:off x="2948400" y="435600"/>
-            <a:ext cx="36000" cy="36000"/>
-          </a:xfrm>
-          <a:prstGeom prst="ellipse">
-            <a:avLst/>
-          </a:prstGeom>
-          <a:solidFill>
-            <a:srgbClr val="E2D8F6"/>
-          </a:solidFill>
-          <a:ln>
-            <a:noFill/>
-          </a:ln>
-        </p:spPr>
-        <p:txBody>
-          <a:bodyPr rtlCol="0" anchor="ctr"/>
-          <a:lstStyle/>
-          <a:p>
-            <a:pPr algn="ctr"/>
-          </a:p>
-        </p:txBody>
-      </p:sp>
-      <p:sp>
-        <p:nvSpPr>
-          <p:cNvPr id="17" name="Oval 16"/>
-          <p:cNvSpPr/>
-          <p:nvPr/>
-        </p:nvSpPr>
-        <p:spPr>
-          <a:xfrm>
-            <a:off x="2948400" y="536400"/>
-            <a:ext cx="36000" cy="36000"/>
-          </a:xfrm>
-          <a:prstGeom prst="ellipse">
-            <a:avLst/>
-          </a:prstGeom>
-          <a:solidFill>
-            <a:srgbClr val="7A2CF5"/>
-          </a:solidFill>
-          <a:ln>
-            <a:noFill/>
-          </a:ln>
-        </p:spPr>
-        <p:txBody>
-          <a:bodyPr rtlCol="0" anchor="ctr"/>
-          <a:lstStyle/>
-          <a:p>
-            <a:pPr algn="ctr"/>
-          </a:p>
-        </p:txBody>
-      </p:sp>
-      <p:sp>
-        <p:nvSpPr>
-          <p:cNvPr id="18" name="Oval 17"/>
-          <p:cNvSpPr/>
-          <p:nvPr/>
-        </p:nvSpPr>
-        <p:spPr>
-          <a:xfrm>
-            <a:off x="3049200" y="234000"/>
-            <a:ext cx="36000" cy="36000"/>
-          </a:xfrm>
-          <a:prstGeom prst="ellipse">
-            <a:avLst/>
-          </a:prstGeom>
-          <a:solidFill>
-            <a:srgbClr val="E2D8F6"/>
-          </a:solidFill>
-          <a:ln>
-            <a:noFill/>
-          </a:ln>
-        </p:spPr>
-        <p:txBody>
-          <a:bodyPr rtlCol="0" anchor="ctr"/>
-          <a:lstStyle/>
-          <a:p>
-            <a:pPr algn="ctr"/>
-          </a:p>
-        </p:txBody>
-      </p:sp>
-      <p:sp>
-        <p:nvSpPr>
-          <p:cNvPr id="19" name="Oval 18"/>
-          <p:cNvSpPr/>
-          <p:nvPr/>
-        </p:nvSpPr>
-        <p:spPr>
-          <a:xfrm>
-            <a:off x="3049200" y="334800"/>
-            <a:ext cx="36000" cy="36000"/>
-          </a:xfrm>
-          <a:prstGeom prst="ellipse">
-            <a:avLst/>
-          </a:prstGeom>
-          <a:solidFill>
-            <a:srgbClr val="E2D8F6"/>
-          </a:solidFill>
-          <a:ln>
-            <a:noFill/>
-          </a:ln>
-        </p:spPr>
-        <p:txBody>
-          <a:bodyPr rtlCol="0" anchor="ctr"/>
-          <a:lstStyle/>
-          <a:p>
-            <a:pPr algn="ctr"/>
-          </a:p>
-        </p:txBody>
-      </p:sp>
-      <p:sp>
-        <p:nvSpPr>
-          <p:cNvPr id="20" name="Oval 19"/>
-          <p:cNvSpPr/>
-          <p:nvPr/>
-        </p:nvSpPr>
-        <p:spPr>
-          <a:xfrm>
-            <a:off x="3049200" y="435600"/>
-            <a:ext cx="36000" cy="36000"/>
-          </a:xfrm>
-          <a:prstGeom prst="ellipse">
-            <a:avLst/>
-          </a:prstGeom>
-          <a:solidFill>
-            <a:srgbClr val="7A2CF5"/>
-          </a:solidFill>
-          <a:ln>
-            <a:noFill/>
-          </a:ln>
-        </p:spPr>
-        <p:txBody>
-          <a:bodyPr rtlCol="0" anchor="ctr"/>
-          <a:lstStyle/>
-          <a:p>
-            <a:pPr algn="ctr"/>
-          </a:p>
-        </p:txBody>
-      </p:sp>
-      <p:sp>
-        <p:nvSpPr>
-          <p:cNvPr id="21" name="Oval 20"/>
-          <p:cNvSpPr/>
-          <p:nvPr/>
-        </p:nvSpPr>
-        <p:spPr>
-          <a:xfrm>
-            <a:off x="3049200" y="536400"/>
-            <a:ext cx="36000" cy="36000"/>
-          </a:xfrm>
-          <a:prstGeom prst="ellipse">
-            <a:avLst/>
-          </a:prstGeom>
-          <a:solidFill>
-            <a:srgbClr val="E2D8F6"/>
-          </a:solidFill>
-          <a:ln>
-            <a:noFill/>
-          </a:ln>
-        </p:spPr>
-        <p:txBody>
-          <a:bodyPr rtlCol="0" anchor="ctr"/>
-          <a:lstStyle/>
-          <a:p>
-            <a:pPr algn="ctr"/>
-          </a:p>
-        </p:txBody>
-      </p:sp>
-      <p:sp>
-        <p:nvSpPr>
-          <p:cNvPr id="22" name="텍스트"/>
+          <p:cNvPr id="4" name="텍스트"/>
           <p:cNvSpPr txBox="1"/>
           <p:nvPr/>
         </p:nvSpPr>
         <p:spPr>
           <a:xfrm>
-            <a:off x="252000" y="223200"/>
-            <a:ext cx="1440000" cy="133351"/>
+            <a:off x="252000" y="252000"/>
+            <a:ext cx="1512000" cy="123826"/>
           </a:xfrm>
           <a:prstGeom prst="rect">
             <a:avLst/>
@@ -3701,11 +3179,11 @@
           <a:p>
             <a:pPr algn="l">
               <a:lnSpc>
-                <a:spcPts val="1015"/>
+                <a:spcPts val="942"/>
               </a:lnSpc>
             </a:pPr>
             <a:r>
-              <a:rPr sz="700" b="1" spc="200">
+              <a:rPr sz="650" b="1" spc="220">
                 <a:solidFill>
                   <a:srgbClr val="6B7280"/>
                 </a:solidFill>
@@ -3719,14 +3197,14 @@
       </p:sp>
       <p:sp>
         <p:nvSpPr>
-          <p:cNvPr id="23" name="텍스트"/>
+          <p:cNvPr id="5" name="텍스트"/>
           <p:cNvSpPr txBox="1"/>
           <p:nvPr/>
         </p:nvSpPr>
         <p:spPr>
           <a:xfrm>
-            <a:off x="252000" y="770400"/>
-            <a:ext cx="2016000" cy="360000"/>
+            <a:off x="252000" y="576000"/>
+            <a:ext cx="1800000" cy="237600"/>
           </a:xfrm>
           <a:prstGeom prst="rect">
             <a:avLst/>
@@ -3741,11 +3219,11 @@
           <a:p>
             <a:pPr algn="l">
               <a:lnSpc>
-                <a:spcPts val="3190"/>
+                <a:spcPts val="1957"/>
               </a:lnSpc>
             </a:pPr>
             <a:r>
-              <a:rPr sz="2200" b="1">
+              <a:rPr sz="1350" b="1" spc="120">
                 <a:solidFill>
                   <a:srgbClr val="12151C"/>
                 </a:solidFill>
@@ -3759,14 +3237,14 @@
       </p:sp>
       <p:sp>
         <p:nvSpPr>
-          <p:cNvPr id="24" name="텍스트"/>
+          <p:cNvPr id="6" name="텍스트"/>
           <p:cNvSpPr txBox="1"/>
           <p:nvPr/>
         </p:nvSpPr>
         <p:spPr>
           <a:xfrm>
-            <a:off x="252000" y="1173600"/>
-            <a:ext cx="2016000" cy="171451"/>
+            <a:off x="252000" y="828000"/>
+            <a:ext cx="1800000" cy="133351"/>
           </a:xfrm>
           <a:prstGeom prst="rect">
             <a:avLst/>
@@ -3781,11 +3259,11 @@
           <a:p>
             <a:pPr algn="l">
               <a:lnSpc>
-                <a:spcPts val="1305"/>
+                <a:spcPts val="1015"/>
               </a:lnSpc>
             </a:pPr>
             <a:r>
-              <a:rPr sz="900" b="0">
+              <a:rPr sz="700" b="0" spc="60">
                 <a:solidFill>
                   <a:srgbClr val="6B7280"/>
                 </a:solidFill>
@@ -3799,14 +3277,14 @@
       </p:sp>
       <p:sp>
         <p:nvSpPr>
-          <p:cNvPr id="25" name="텍스트"/>
+          <p:cNvPr id="7" name="텍스트"/>
           <p:cNvSpPr txBox="1"/>
           <p:nvPr/>
         </p:nvSpPr>
         <p:spPr>
           <a:xfrm>
-            <a:off x="1620000" y="1339200"/>
-            <a:ext cx="1368000" cy="133351"/>
+            <a:off x="252000" y="1411200"/>
+            <a:ext cx="900000" cy="91441"/>
           </a:xfrm>
           <a:prstGeom prst="rect">
             <a:avLst/>
@@ -3819,13 +3297,53 @@
           </a:bodyPr>
           <a:lstStyle/>
           <a:p>
-            <a:pPr algn="r">
+            <a:pPr algn="l">
               <a:lnSpc>
-                <a:spcPts val="1015"/>
+                <a:spcPts val="696"/>
               </a:lnSpc>
             </a:pPr>
             <a:r>
-              <a:rPr sz="700" b="0">
+              <a:rPr sz="480" b="1" spc="140">
+                <a:solidFill>
+                  <a:srgbClr val="6B7280"/>
+                </a:solidFill>
+                <a:latin typeface="맑은 고딕"/>
+                <a:ea typeface="맑은 고딕"/>
+              </a:rPr>
+              <a:t>TEL</a:t>
+            </a:r>
+          </a:p>
+        </p:txBody>
+      </p:sp>
+      <p:sp>
+        <p:nvSpPr>
+          <p:cNvPr id="8" name="텍스트"/>
+          <p:cNvSpPr txBox="1"/>
+          <p:nvPr/>
+        </p:nvSpPr>
+        <p:spPr>
+          <a:xfrm>
+            <a:off x="252000" y="1512000"/>
+            <a:ext cx="900000" cy="120016"/>
+          </a:xfrm>
+          <a:prstGeom prst="rect">
+            <a:avLst/>
+          </a:prstGeom>
+          <a:noFill/>
+        </p:spPr>
+        <p:txBody>
+          <a:bodyPr wrap="square" lIns="0" rIns="0" tIns="0" bIns="0" anchor="t">
+            <a:spAutoFit/>
+          </a:bodyPr>
+          <a:lstStyle/>
+          <a:p>
+            <a:pPr algn="l">
+              <a:lnSpc>
+                <a:spcPts val="913"/>
+              </a:lnSpc>
+            </a:pPr>
+            <a:r>
+              <a:rPr sz="630" b="0">
                 <a:solidFill>
                   <a:srgbClr val="12151C"/>
                 </a:solidFill>
@@ -3837,16 +3355,37 @@
           </a:p>
         </p:txBody>
       </p:sp>
-      <p:sp>
-        <p:nvSpPr>
-          <p:cNvPr id="26" name="텍스트"/>
+      <p:cxnSp>
+        <p:nvCxnSpPr>
+          <p:cNvPr id="9" name="Connector 8"/>
+          <p:cNvCxnSpPr/>
+          <p:nvPr/>
+        </p:nvCxnSpPr>
+        <p:spPr>
+          <a:xfrm>
+            <a:off x="1072800" y="1411200"/>
+            <a:ext cx="0" cy="201600"/>
+          </a:xfrm>
+          <a:prstGeom prst="line">
+            <a:avLst/>
+          </a:prstGeom>
+          <a:ln w="3600">
+            <a:solidFill>
+              <a:srgbClr val="DCDFE4"/>
+            </a:solidFill>
+          </a:ln>
+        </p:spPr>
+      </p:cxnSp>
+      <p:sp>
+        <p:nvSpPr>
+          <p:cNvPr id="10" name="텍스트"/>
           <p:cNvSpPr txBox="1"/>
           <p:nvPr/>
         </p:nvSpPr>
         <p:spPr>
           <a:xfrm>
-            <a:off x="1620000" y="1476000"/>
-            <a:ext cx="1368000" cy="133351"/>
+            <a:off x="1152000" y="1411200"/>
+            <a:ext cx="1008000" cy="91441"/>
           </a:xfrm>
           <a:prstGeom prst="rect">
             <a:avLst/>
@@ -3859,13 +3398,53 @@
           </a:bodyPr>
           <a:lstStyle/>
           <a:p>
-            <a:pPr algn="r">
+            <a:pPr algn="l">
               <a:lnSpc>
-                <a:spcPts val="1015"/>
+                <a:spcPts val="696"/>
               </a:lnSpc>
             </a:pPr>
             <a:r>
-              <a:rPr sz="700" b="0">
+              <a:rPr sz="480" b="1" spc="140">
+                <a:solidFill>
+                  <a:srgbClr val="6B7280"/>
+                </a:solidFill>
+                <a:latin typeface="맑은 고딕"/>
+                <a:ea typeface="맑은 고딕"/>
+              </a:rPr>
+              <a:t>MAIL</a:t>
+            </a:r>
+          </a:p>
+        </p:txBody>
+      </p:sp>
+      <p:sp>
+        <p:nvSpPr>
+          <p:cNvPr id="11" name="텍스트"/>
+          <p:cNvSpPr txBox="1"/>
+          <p:nvPr/>
+        </p:nvSpPr>
+        <p:spPr>
+          <a:xfrm>
+            <a:off x="1152000" y="1512000"/>
+            <a:ext cx="1008000" cy="120016"/>
+          </a:xfrm>
+          <a:prstGeom prst="rect">
+            <a:avLst/>
+          </a:prstGeom>
+          <a:noFill/>
+        </p:spPr>
+        <p:txBody>
+          <a:bodyPr wrap="square" lIns="0" rIns="0" tIns="0" bIns="0" anchor="t">
+            <a:spAutoFit/>
+          </a:bodyPr>
+          <a:lstStyle/>
+          <a:p>
+            <a:pPr algn="l">
+              <a:lnSpc>
+                <a:spcPts val="913"/>
+              </a:lnSpc>
+            </a:pPr>
+            <a:r>
+              <a:rPr sz="630" b="0">
                 <a:solidFill>
                   <a:srgbClr val="12151C"/>
                 </a:solidFill>
@@ -3877,16 +3456,37 @@
           </a:p>
         </p:txBody>
       </p:sp>
-      <p:sp>
-        <p:nvSpPr>
-          <p:cNvPr id="27" name="텍스트"/>
+      <p:cxnSp>
+        <p:nvCxnSpPr>
+          <p:cNvPr id="12" name="Connector 11"/>
+          <p:cNvCxnSpPr/>
+          <p:nvPr/>
+        </p:nvCxnSpPr>
+        <p:spPr>
+          <a:xfrm>
+            <a:off x="2080800" y="1411200"/>
+            <a:ext cx="0" cy="201600"/>
+          </a:xfrm>
+          <a:prstGeom prst="line">
+            <a:avLst/>
+          </a:prstGeom>
+          <a:ln w="3600">
+            <a:solidFill>
+              <a:srgbClr val="DCDFE4"/>
+            </a:solidFill>
+          </a:ln>
+        </p:spPr>
+      </p:cxnSp>
+      <p:sp>
+        <p:nvSpPr>
+          <p:cNvPr id="13" name="텍스트"/>
           <p:cNvSpPr txBox="1"/>
           <p:nvPr/>
         </p:nvSpPr>
         <p:spPr>
           <a:xfrm>
-            <a:off x="1620000" y="1612800"/>
-            <a:ext cx="1368000" cy="133351"/>
+            <a:off x="2160000" y="1411200"/>
+            <a:ext cx="972000" cy="91441"/>
           </a:xfrm>
           <a:prstGeom prst="rect">
             <a:avLst/>
@@ -3899,13 +3499,53 @@
           </a:bodyPr>
           <a:lstStyle/>
           <a:p>
-            <a:pPr algn="r">
+            <a:pPr algn="l">
               <a:lnSpc>
-                <a:spcPts val="1015"/>
+                <a:spcPts val="696"/>
               </a:lnSpc>
             </a:pPr>
             <a:r>
-              <a:rPr sz="700" b="0">
+              <a:rPr sz="480" b="1" spc="140">
+                <a:solidFill>
+                  <a:srgbClr val="6B7280"/>
+                </a:solidFill>
+                <a:latin typeface="맑은 고딕"/>
+                <a:ea typeface="맑은 고딕"/>
+              </a:rPr>
+              <a:t>ADDR</a:t>
+            </a:r>
+          </a:p>
+        </p:txBody>
+      </p:sp>
+      <p:sp>
+        <p:nvSpPr>
+          <p:cNvPr id="14" name="텍스트"/>
+          <p:cNvSpPr txBox="1"/>
+          <p:nvPr/>
+        </p:nvSpPr>
+        <p:spPr>
+          <a:xfrm>
+            <a:off x="2160000" y="1512000"/>
+            <a:ext cx="972000" cy="120016"/>
+          </a:xfrm>
+          <a:prstGeom prst="rect">
+            <a:avLst/>
+          </a:prstGeom>
+          <a:noFill/>
+        </p:spPr>
+        <p:txBody>
+          <a:bodyPr wrap="square" lIns="0" rIns="0" tIns="0" bIns="0" anchor="t">
+            <a:spAutoFit/>
+          </a:bodyPr>
+          <a:lstStyle/>
+          <a:p>
+            <a:pPr algn="l">
+              <a:lnSpc>
+                <a:spcPts val="913"/>
+              </a:lnSpc>
+            </a:pPr>
+            <a:r>
+              <a:rPr sz="630" b="0">
                 <a:solidFill>
                   <a:srgbClr val="12151C"/>
                 </a:solidFill>
@@ -3945,14 +3585,54 @@
       <p:grpSpPr/>
       <p:sp>
         <p:nvSpPr>
-          <p:cNvPr id="2" name="Rectangle 1"/>
+          <p:cNvPr id="2" name="텍스트"/>
+          <p:cNvSpPr txBox="1"/>
+          <p:nvPr/>
+        </p:nvSpPr>
+        <p:spPr>
+          <a:xfrm>
+            <a:off x="252000" y="252000"/>
+            <a:ext cx="1080000" cy="99061"/>
+          </a:xfrm>
+          <a:prstGeom prst="rect">
+            <a:avLst/>
+          </a:prstGeom>
+          <a:noFill/>
+        </p:spPr>
+        <p:txBody>
+          <a:bodyPr wrap="square" lIns="0" rIns="0" tIns="0" bIns="0" anchor="t">
+            <a:spAutoFit/>
+          </a:bodyPr>
+          <a:lstStyle/>
+          <a:p>
+            <a:pPr algn="l">
+              <a:lnSpc>
+                <a:spcPts val="754"/>
+              </a:lnSpc>
+            </a:pPr>
+            <a:r>
+              <a:rPr sz="520" b="1" spc="240">
+                <a:solidFill>
+                  <a:srgbClr val="A3A9B5"/>
+                </a:solidFill>
+                <a:latin typeface="맑은 고딕"/>
+                <a:ea typeface="맑은 고딕"/>
+              </a:rPr>
+              <a:t>취급 품목</a:t>
+            </a:r>
+          </a:p>
+        </p:txBody>
+      </p:sp>
+      <p:sp>
+        <p:nvSpPr>
+          <p:cNvPr id="3" name="Rectangle 2"/>
           <p:cNvSpPr/>
           <p:nvPr/>
         </p:nvSpPr>
         <p:spPr>
           <a:xfrm>
-            <a:off x="0" y="0"/>
-            <a:ext cx="3240000" cy="1800000"/>
+            <a:off x="252000" y="352800"/>
+            <a:ext cx="108000" cy="14400"/>
           </a:xfrm>
           <a:prstGeom prst="rect">
             <a:avLst/>
@@ -3972,132 +3652,37 @@
           </a:p>
         </p:txBody>
       </p:sp>
-      <p:sp>
-        <p:nvSpPr>
-          <p:cNvPr id="3" name="Freeform 2"/>
-          <p:cNvSpPr/>
+      <p:cxnSp>
+        <p:nvCxnSpPr>
+          <p:cNvPr id="4" name="Connector 3"/>
+          <p:cNvCxnSpPr/>
           <p:nvPr/>
-        </p:nvSpPr>
-        <p:spPr>
-          <a:xfrm>
-            <a:off x="2412000" y="972000"/>
-            <a:ext cx="828000" cy="828000"/>
-          </a:xfrm>
-          <a:custGeom>
+        </p:nvCxnSpPr>
+        <p:spPr>
+          <a:xfrm>
+            <a:off x="252000" y="453600"/>
+            <a:ext cx="1512000" cy="0"/>
+          </a:xfrm>
+          <a:prstGeom prst="line">
             <a:avLst/>
-            <a:gdLst/>
-            <a:ahLst/>
-            <a:cxnLst/>
-            <a:rect l="l" t="t" r="r" b="b"/>
-            <a:pathLst>
-              <a:path w="828000" h="828000">
-                <a:moveTo>
-                  <a:pt x="828000" y="828000"/>
-                </a:moveTo>
-                <a:lnTo>
-                  <a:pt x="0" y="828000"/>
-                </a:lnTo>
-                <a:lnTo>
-                  <a:pt x="1773" y="773846"/>
-                </a:lnTo>
-                <a:lnTo>
-                  <a:pt x="7084" y="719924"/>
-                </a:lnTo>
-                <a:lnTo>
-                  <a:pt x="15910" y="666465"/>
-                </a:lnTo>
-                <a:lnTo>
-                  <a:pt x="28213" y="613698"/>
-                </a:lnTo>
-                <a:lnTo>
-                  <a:pt x="43942" y="561848"/>
-                </a:lnTo>
-                <a:lnTo>
-                  <a:pt x="63028" y="511138"/>
-                </a:lnTo>
-                <a:lnTo>
-                  <a:pt x="85389" y="461785"/>
-                </a:lnTo>
-                <a:lnTo>
-                  <a:pt x="110931" y="414000"/>
-                </a:lnTo>
-                <a:lnTo>
-                  <a:pt x="139543" y="367988"/>
-                </a:lnTo>
-                <a:lnTo>
-                  <a:pt x="171103" y="323946"/>
-                </a:lnTo>
-                <a:lnTo>
-                  <a:pt x="205477" y="282062"/>
-                </a:lnTo>
-                <a:lnTo>
-                  <a:pt x="242516" y="242516"/>
-                </a:lnTo>
-                <a:lnTo>
-                  <a:pt x="282062" y="205477"/>
-                </a:lnTo>
-                <a:lnTo>
-                  <a:pt x="323946" y="171103"/>
-                </a:lnTo>
-                <a:lnTo>
-                  <a:pt x="367988" y="139543"/>
-                </a:lnTo>
-                <a:lnTo>
-                  <a:pt x="414000" y="110931"/>
-                </a:lnTo>
-                <a:lnTo>
-                  <a:pt x="461785" y="85389"/>
-                </a:lnTo>
-                <a:lnTo>
-                  <a:pt x="511138" y="63028"/>
-                </a:lnTo>
-                <a:lnTo>
-                  <a:pt x="561848" y="43942"/>
-                </a:lnTo>
-                <a:lnTo>
-                  <a:pt x="613698" y="28213"/>
-                </a:lnTo>
-                <a:lnTo>
-                  <a:pt x="666465" y="15910"/>
-                </a:lnTo>
-                <a:lnTo>
-                  <a:pt x="719924" y="7084"/>
-                </a:lnTo>
-                <a:lnTo>
-                  <a:pt x="773846" y="1773"/>
-                </a:lnTo>
-                <a:lnTo>
-                  <a:pt x="828000" y="0"/>
-                </a:lnTo>
-                <a:close/>
-              </a:path>
-            </a:pathLst>
-          </a:custGeom>
-          <a:solidFill>
-            <a:srgbClr val="AF7FF9"/>
-          </a:solidFill>
-          <a:ln>
-            <a:noFill/>
+          </a:prstGeom>
+          <a:ln w="3600">
+            <a:solidFill>
+              <a:srgbClr val="2A2F38"/>
+            </a:solidFill>
           </a:ln>
         </p:spPr>
-        <p:txBody>
-          <a:bodyPr rtlCol="0" anchor="ctr"/>
-          <a:lstStyle/>
-          <a:p>
-            <a:pPr algn="ctr"/>
-          </a:p>
-        </p:txBody>
-      </p:sp>
-      <p:sp>
-        <p:nvSpPr>
-          <p:cNvPr id="4" name="텍스트"/>
+      </p:cxnSp>
+      <p:sp>
+        <p:nvSpPr>
+          <p:cNvPr id="5" name="텍스트"/>
           <p:cNvSpPr txBox="1"/>
           <p:nvPr/>
         </p:nvSpPr>
         <p:spPr>
           <a:xfrm>
-            <a:off x="252000" y="432000"/>
-            <a:ext cx="2304000" cy="720000"/>
+            <a:off x="252000" y="507600"/>
+            <a:ext cx="216000" cy="95251"/>
           </a:xfrm>
           <a:prstGeom prst="rect">
             <a:avLst/>
@@ -4112,32 +3697,133 @@
           <a:p>
             <a:pPr algn="l">
               <a:lnSpc>
-                <a:spcPts val="1884"/>
+                <a:spcPts val="725"/>
               </a:lnSpc>
             </a:pPr>
             <a:r>
-              <a:rPr sz="1300" b="1">
+              <a:rPr sz="500" b="1" spc="100">
+                <a:solidFill>
+                  <a:srgbClr val="A3A9B5"/>
+                </a:solidFill>
+                <a:latin typeface="맑은 고딕"/>
+                <a:ea typeface="맑은 고딕"/>
+              </a:rPr>
+              <a:t>01</a:t>
+            </a:r>
+          </a:p>
+        </p:txBody>
+      </p:sp>
+      <p:sp>
+        <p:nvSpPr>
+          <p:cNvPr id="6" name="텍스트"/>
+          <p:cNvSpPr txBox="1"/>
+          <p:nvPr/>
+        </p:nvSpPr>
+        <p:spPr>
+          <a:xfrm>
+            <a:off x="489600" y="496800"/>
+            <a:ext cx="1260000" cy="133351"/>
+          </a:xfrm>
+          <a:prstGeom prst="rect">
+            <a:avLst/>
+          </a:prstGeom>
+          <a:noFill/>
+        </p:spPr>
+        <p:txBody>
+          <a:bodyPr wrap="square" lIns="0" rIns="0" tIns="0" bIns="0" anchor="t">
+            <a:spAutoFit/>
+          </a:bodyPr>
+          <a:lstStyle/>
+          <a:p>
+            <a:pPr algn="l">
+              <a:lnSpc>
+                <a:spcPts val="1015"/>
+              </a:lnSpc>
+            </a:pPr>
+            <a:r>
+              <a:rPr sz="700" b="0">
                 <a:solidFill>
                   <a:srgbClr val="FFFFFF"/>
                 </a:solidFill>
                 <a:latin typeface="맑은 고딕"/>
                 <a:ea typeface="맑은 고딕"/>
               </a:rPr>
-              <a:t>믿고 맡기는 동네 가게</a:t>
-            </a:r>
-          </a:p>
-        </p:txBody>
-      </p:sp>
-      <p:sp>
-        <p:nvSpPr>
-          <p:cNvPr id="5" name="텍스트"/>
+              <a:t>도어락</a:t>
+            </a:r>
+          </a:p>
+        </p:txBody>
+      </p:sp>
+      <p:cxnSp>
+        <p:nvCxnSpPr>
+          <p:cNvPr id="7" name="Connector 6"/>
+          <p:cNvCxnSpPr/>
+          <p:nvPr/>
+        </p:nvCxnSpPr>
+        <p:spPr>
+          <a:xfrm>
+            <a:off x="252000" y="640800"/>
+            <a:ext cx="1512000" cy="0"/>
+          </a:xfrm>
+          <a:prstGeom prst="line">
+            <a:avLst/>
+          </a:prstGeom>
+          <a:ln w="3600">
+            <a:solidFill>
+              <a:srgbClr val="2A2F38"/>
+            </a:solidFill>
+          </a:ln>
+        </p:spPr>
+      </p:cxnSp>
+      <p:sp>
+        <p:nvSpPr>
+          <p:cNvPr id="8" name="텍스트"/>
           <p:cNvSpPr txBox="1"/>
           <p:nvPr/>
         </p:nvSpPr>
         <p:spPr>
           <a:xfrm>
-            <a:off x="252000" y="1476000"/>
-            <a:ext cx="1800000" cy="133351"/>
+            <a:off x="252000" y="694800"/>
+            <a:ext cx="216000" cy="95251"/>
+          </a:xfrm>
+          <a:prstGeom prst="rect">
+            <a:avLst/>
+          </a:prstGeom>
+          <a:noFill/>
+        </p:spPr>
+        <p:txBody>
+          <a:bodyPr wrap="square" lIns="0" rIns="0" tIns="0" bIns="0" anchor="t">
+            <a:spAutoFit/>
+          </a:bodyPr>
+          <a:lstStyle/>
+          <a:p>
+            <a:pPr algn="l">
+              <a:lnSpc>
+                <a:spcPts val="725"/>
+              </a:lnSpc>
+            </a:pPr>
+            <a:r>
+              <a:rPr sz="500" b="1" spc="100">
+                <a:solidFill>
+                  <a:srgbClr val="A3A9B5"/>
+                </a:solidFill>
+                <a:latin typeface="맑은 고딕"/>
+                <a:ea typeface="맑은 고딕"/>
+              </a:rPr>
+              <a:t>02</a:t>
+            </a:r>
+          </a:p>
+        </p:txBody>
+      </p:sp>
+      <p:sp>
+        <p:nvSpPr>
+          <p:cNvPr id="9" name="텍스트"/>
+          <p:cNvSpPr txBox="1"/>
+          <p:nvPr/>
+        </p:nvSpPr>
+        <p:spPr>
+          <a:xfrm>
+            <a:off x="489600" y="684000"/>
+            <a:ext cx="1260000" cy="133351"/>
           </a:xfrm>
           <a:prstGeom prst="rect">
             <a:avLst/>
@@ -4156,7 +3842,484 @@
               </a:lnSpc>
             </a:pPr>
             <a:r>
-              <a:rPr sz="700" b="1" spc="200">
+              <a:rPr sz="700" b="0">
+                <a:solidFill>
+                  <a:srgbClr val="FFFFFF"/>
+                </a:solidFill>
+                <a:latin typeface="맑은 고딕"/>
+                <a:ea typeface="맑은 고딕"/>
+              </a:rPr>
+              <a:t>인테리어</a:t>
+            </a:r>
+          </a:p>
+        </p:txBody>
+      </p:sp>
+      <p:cxnSp>
+        <p:nvCxnSpPr>
+          <p:cNvPr id="10" name="Connector 9"/>
+          <p:cNvCxnSpPr/>
+          <p:nvPr/>
+        </p:nvCxnSpPr>
+        <p:spPr>
+          <a:xfrm>
+            <a:off x="252000" y="828000"/>
+            <a:ext cx="1512000" cy="0"/>
+          </a:xfrm>
+          <a:prstGeom prst="line">
+            <a:avLst/>
+          </a:prstGeom>
+          <a:ln w="3600">
+            <a:solidFill>
+              <a:srgbClr val="2A2F38"/>
+            </a:solidFill>
+          </a:ln>
+        </p:spPr>
+      </p:cxnSp>
+      <p:sp>
+        <p:nvSpPr>
+          <p:cNvPr id="11" name="텍스트"/>
+          <p:cNvSpPr txBox="1"/>
+          <p:nvPr/>
+        </p:nvSpPr>
+        <p:spPr>
+          <a:xfrm>
+            <a:off x="252000" y="882000"/>
+            <a:ext cx="216000" cy="95251"/>
+          </a:xfrm>
+          <a:prstGeom prst="rect">
+            <a:avLst/>
+          </a:prstGeom>
+          <a:noFill/>
+        </p:spPr>
+        <p:txBody>
+          <a:bodyPr wrap="square" lIns="0" rIns="0" tIns="0" bIns="0" anchor="t">
+            <a:spAutoFit/>
+          </a:bodyPr>
+          <a:lstStyle/>
+          <a:p>
+            <a:pPr algn="l">
+              <a:lnSpc>
+                <a:spcPts val="725"/>
+              </a:lnSpc>
+            </a:pPr>
+            <a:r>
+              <a:rPr sz="500" b="1" spc="100">
+                <a:solidFill>
+                  <a:srgbClr val="A3A9B5"/>
+                </a:solidFill>
+                <a:latin typeface="맑은 고딕"/>
+                <a:ea typeface="맑은 고딕"/>
+              </a:rPr>
+              <a:t>03</a:t>
+            </a:r>
+          </a:p>
+        </p:txBody>
+      </p:sp>
+      <p:sp>
+        <p:nvSpPr>
+          <p:cNvPr id="12" name="텍스트"/>
+          <p:cNvSpPr txBox="1"/>
+          <p:nvPr/>
+        </p:nvSpPr>
+        <p:spPr>
+          <a:xfrm>
+            <a:off x="489600" y="871200"/>
+            <a:ext cx="1260000" cy="133351"/>
+          </a:xfrm>
+          <a:prstGeom prst="rect">
+            <a:avLst/>
+          </a:prstGeom>
+          <a:noFill/>
+        </p:spPr>
+        <p:txBody>
+          <a:bodyPr wrap="square" lIns="0" rIns="0" tIns="0" bIns="0" anchor="t">
+            <a:spAutoFit/>
+          </a:bodyPr>
+          <a:lstStyle/>
+          <a:p>
+            <a:pPr algn="l">
+              <a:lnSpc>
+                <a:spcPts val="1015"/>
+              </a:lnSpc>
+            </a:pPr>
+            <a:r>
+              <a:rPr sz="700" b="0">
+                <a:solidFill>
+                  <a:srgbClr val="FFFFFF"/>
+                </a:solidFill>
+                <a:latin typeface="맑은 고딕"/>
+                <a:ea typeface="맑은 고딕"/>
+              </a:rPr>
+              <a:t>소품 · 문구</a:t>
+            </a:r>
+          </a:p>
+        </p:txBody>
+      </p:sp>
+      <p:cxnSp>
+        <p:nvCxnSpPr>
+          <p:cNvPr id="13" name="Connector 12"/>
+          <p:cNvCxnSpPr/>
+          <p:nvPr/>
+        </p:nvCxnSpPr>
+        <p:spPr>
+          <a:xfrm>
+            <a:off x="252000" y="1015200"/>
+            <a:ext cx="1512000" cy="0"/>
+          </a:xfrm>
+          <a:prstGeom prst="line">
+            <a:avLst/>
+          </a:prstGeom>
+          <a:ln w="3600">
+            <a:solidFill>
+              <a:srgbClr val="2A2F38"/>
+            </a:solidFill>
+          </a:ln>
+        </p:spPr>
+      </p:cxnSp>
+      <p:sp>
+        <p:nvSpPr>
+          <p:cNvPr id="14" name="텍스트"/>
+          <p:cNvSpPr txBox="1"/>
+          <p:nvPr/>
+        </p:nvSpPr>
+        <p:spPr>
+          <a:xfrm>
+            <a:off x="252000" y="1069200"/>
+            <a:ext cx="216000" cy="95251"/>
+          </a:xfrm>
+          <a:prstGeom prst="rect">
+            <a:avLst/>
+          </a:prstGeom>
+          <a:noFill/>
+        </p:spPr>
+        <p:txBody>
+          <a:bodyPr wrap="square" lIns="0" rIns="0" tIns="0" bIns="0" anchor="t">
+            <a:spAutoFit/>
+          </a:bodyPr>
+          <a:lstStyle/>
+          <a:p>
+            <a:pPr algn="l">
+              <a:lnSpc>
+                <a:spcPts val="725"/>
+              </a:lnSpc>
+            </a:pPr>
+            <a:r>
+              <a:rPr sz="500" b="1" spc="100">
+                <a:solidFill>
+                  <a:srgbClr val="A3A9B5"/>
+                </a:solidFill>
+                <a:latin typeface="맑은 고딕"/>
+                <a:ea typeface="맑은 고딕"/>
+              </a:rPr>
+              <a:t>04</a:t>
+            </a:r>
+          </a:p>
+        </p:txBody>
+      </p:sp>
+      <p:sp>
+        <p:nvSpPr>
+          <p:cNvPr id="15" name="텍스트"/>
+          <p:cNvSpPr txBox="1"/>
+          <p:nvPr/>
+        </p:nvSpPr>
+        <p:spPr>
+          <a:xfrm>
+            <a:off x="489600" y="1058400"/>
+            <a:ext cx="1260000" cy="133351"/>
+          </a:xfrm>
+          <a:prstGeom prst="rect">
+            <a:avLst/>
+          </a:prstGeom>
+          <a:noFill/>
+        </p:spPr>
+        <p:txBody>
+          <a:bodyPr wrap="square" lIns="0" rIns="0" tIns="0" bIns="0" anchor="t">
+            <a:spAutoFit/>
+          </a:bodyPr>
+          <a:lstStyle/>
+          <a:p>
+            <a:pPr algn="l">
+              <a:lnSpc>
+                <a:spcPts val="1015"/>
+              </a:lnSpc>
+            </a:pPr>
+            <a:r>
+              <a:rPr sz="700" b="0">
+                <a:solidFill>
+                  <a:srgbClr val="FFFFFF"/>
+                </a:solidFill>
+                <a:latin typeface="맑은 고딕"/>
+                <a:ea typeface="맑은 고딕"/>
+              </a:rPr>
+              <a:t>반려동물 미용</a:t>
+            </a:r>
+          </a:p>
+        </p:txBody>
+      </p:sp>
+      <p:cxnSp>
+        <p:nvCxnSpPr>
+          <p:cNvPr id="16" name="Connector 15"/>
+          <p:cNvCxnSpPr/>
+          <p:nvPr/>
+        </p:nvCxnSpPr>
+        <p:spPr>
+          <a:xfrm>
+            <a:off x="252000" y="1202400"/>
+            <a:ext cx="1512000" cy="0"/>
+          </a:xfrm>
+          <a:prstGeom prst="line">
+            <a:avLst/>
+          </a:prstGeom>
+          <a:ln w="3600">
+            <a:solidFill>
+              <a:srgbClr val="2A2F38"/>
+            </a:solidFill>
+          </a:ln>
+        </p:spPr>
+      </p:cxnSp>
+      <p:sp>
+        <p:nvSpPr>
+          <p:cNvPr id="17" name="Rectangle 16"/>
+          <p:cNvSpPr/>
+          <p:nvPr/>
+        </p:nvSpPr>
+        <p:spPr>
+          <a:xfrm>
+            <a:off x="2088000" y="252000"/>
+            <a:ext cx="900000" cy="1296000"/>
+          </a:xfrm>
+          <a:prstGeom prst="rect">
+            <a:avLst/>
+          </a:prstGeom>
+          <a:solidFill>
+            <a:srgbClr val="985BF7"/>
+          </a:solidFill>
+          <a:ln>
+            <a:noFill/>
+          </a:ln>
+        </p:spPr>
+        <p:txBody>
+          <a:bodyPr rtlCol="0" anchor="ctr"/>
+          <a:lstStyle/>
+          <a:p>
+            <a:pPr algn="ctr"/>
+          </a:p>
+        </p:txBody>
+      </p:sp>
+      <p:sp>
+        <p:nvSpPr>
+          <p:cNvPr id="18" name="텍스트"/>
+          <p:cNvSpPr txBox="1"/>
+          <p:nvPr/>
+        </p:nvSpPr>
+        <p:spPr>
+          <a:xfrm>
+            <a:off x="2196000" y="360000"/>
+            <a:ext cx="684000" cy="95251"/>
+          </a:xfrm>
+          <a:prstGeom prst="rect">
+            <a:avLst/>
+          </a:prstGeom>
+          <a:noFill/>
+        </p:spPr>
+        <p:txBody>
+          <a:bodyPr wrap="square" lIns="0" rIns="0" tIns="0" bIns="0" anchor="t">
+            <a:spAutoFit/>
+          </a:bodyPr>
+          <a:lstStyle/>
+          <a:p>
+            <a:pPr algn="l">
+              <a:lnSpc>
+                <a:spcPts val="725"/>
+              </a:lnSpc>
+            </a:pPr>
+            <a:r>
+              <a:rPr sz="500" b="1" spc="240">
+                <a:solidFill>
+                  <a:srgbClr val="FFFFFF">
+                    <a:alpha val="75000"/>
+                  </a:srgbClr>
+                </a:solidFill>
+                <a:latin typeface="맑은 고딕"/>
+                <a:ea typeface="맑은 고딕"/>
+              </a:rPr>
+              <a:t>INFO</a:t>
+            </a:r>
+          </a:p>
+        </p:txBody>
+      </p:sp>
+      <p:sp>
+        <p:nvSpPr>
+          <p:cNvPr id="19" name="텍스트"/>
+          <p:cNvSpPr txBox="1"/>
+          <p:nvPr/>
+        </p:nvSpPr>
+        <p:spPr>
+          <a:xfrm>
+            <a:off x="2196000" y="504000"/>
+            <a:ext cx="684000" cy="121921"/>
+          </a:xfrm>
+          <a:prstGeom prst="rect">
+            <a:avLst/>
+          </a:prstGeom>
+          <a:noFill/>
+        </p:spPr>
+        <p:txBody>
+          <a:bodyPr wrap="square" lIns="0" rIns="0" tIns="0" bIns="0" anchor="t">
+            <a:spAutoFit/>
+          </a:bodyPr>
+          <a:lstStyle/>
+          <a:p>
+            <a:pPr algn="l">
+              <a:lnSpc>
+                <a:spcPts val="927"/>
+              </a:lnSpc>
+            </a:pPr>
+            <a:r>
+              <a:rPr sz="640" b="1">
+                <a:solidFill>
+                  <a:srgbClr val="FFFFFF"/>
+                </a:solidFill>
+                <a:latin typeface="맑은 고딕"/>
+                <a:ea typeface="맑은 고딕"/>
+              </a:rPr>
+              <a:t>매일 10:00 – 20:00</a:t>
+            </a:r>
+          </a:p>
+        </p:txBody>
+      </p:sp>
+      <p:cxnSp>
+        <p:nvCxnSpPr>
+          <p:cNvPr id="20" name="Connector 19"/>
+          <p:cNvCxnSpPr/>
+          <p:nvPr/>
+        </p:nvCxnSpPr>
+        <p:spPr>
+          <a:xfrm>
+            <a:off x="2196000" y="770400"/>
+            <a:ext cx="684000" cy="0"/>
+          </a:xfrm>
+          <a:prstGeom prst="line">
+            <a:avLst/>
+          </a:prstGeom>
+          <a:ln w="3600">
+            <a:solidFill>
+              <a:srgbClr val="FFFFFF"/>
+            </a:solidFill>
+          </a:ln>
+        </p:spPr>
+      </p:cxnSp>
+      <p:sp>
+        <p:nvSpPr>
+          <p:cNvPr id="21" name="텍스트"/>
+          <p:cNvSpPr txBox="1"/>
+          <p:nvPr/>
+        </p:nvSpPr>
+        <p:spPr>
+          <a:xfrm>
+            <a:off x="2196000" y="849600"/>
+            <a:ext cx="684000" cy="91441"/>
+          </a:xfrm>
+          <a:prstGeom prst="rect">
+            <a:avLst/>
+          </a:prstGeom>
+          <a:noFill/>
+        </p:spPr>
+        <p:txBody>
+          <a:bodyPr wrap="square" lIns="0" rIns="0" tIns="0" bIns="0" anchor="t">
+            <a:spAutoFit/>
+          </a:bodyPr>
+          <a:lstStyle/>
+          <a:p>
+            <a:pPr algn="l">
+              <a:lnSpc>
+                <a:spcPts val="696"/>
+              </a:lnSpc>
+            </a:pPr>
+            <a:r>
+              <a:rPr sz="480" b="1" spc="140">
+                <a:solidFill>
+                  <a:srgbClr val="FFFFFF">
+                    <a:alpha val="75000"/>
+                  </a:srgbClr>
+                </a:solidFill>
+                <a:latin typeface="맑은 고딕"/>
+                <a:ea typeface="맑은 고딕"/>
+              </a:rPr>
+              <a:t>BLOG</a:t>
+            </a:r>
+          </a:p>
+        </p:txBody>
+      </p:sp>
+      <p:sp>
+        <p:nvSpPr>
+          <p:cNvPr id="22" name="텍스트"/>
+          <p:cNvSpPr txBox="1"/>
+          <p:nvPr/>
+        </p:nvSpPr>
+        <p:spPr>
+          <a:xfrm>
+            <a:off x="2196000" y="957600"/>
+            <a:ext cx="684000" cy="121921"/>
+          </a:xfrm>
+          <a:prstGeom prst="rect">
+            <a:avLst/>
+          </a:prstGeom>
+          <a:noFill/>
+        </p:spPr>
+        <p:txBody>
+          <a:bodyPr wrap="square" lIns="0" rIns="0" tIns="0" bIns="0" anchor="t">
+            <a:spAutoFit/>
+          </a:bodyPr>
+          <a:lstStyle/>
+          <a:p>
+            <a:pPr algn="l">
+              <a:lnSpc>
+                <a:spcPts val="927"/>
+              </a:lnSpc>
+            </a:pPr>
+            <a:r>
+              <a:rPr sz="640" b="1">
+                <a:solidFill>
+                  <a:srgbClr val="FFFFFF"/>
+                </a:solidFill>
+                <a:latin typeface="맑은 고딕"/>
+                <a:ea typeface="맑은 고딕"/>
+              </a:rPr>
+              <a:t>blog.example.com</a:t>
+            </a:r>
+          </a:p>
+        </p:txBody>
+      </p:sp>
+      <p:sp>
+        <p:nvSpPr>
+          <p:cNvPr id="23" name="텍스트"/>
+          <p:cNvSpPr txBox="1"/>
+          <p:nvPr/>
+        </p:nvSpPr>
+        <p:spPr>
+          <a:xfrm>
+            <a:off x="2196000" y="1368000"/>
+            <a:ext cx="720000" cy="106681"/>
+          </a:xfrm>
+          <a:prstGeom prst="rect">
+            <a:avLst/>
+          </a:prstGeom>
+          <a:noFill/>
+        </p:spPr>
+        <p:txBody>
+          <a:bodyPr wrap="square" lIns="0" rIns="0" tIns="0" bIns="0" anchor="t">
+            <a:spAutoFit/>
+          </a:bodyPr>
+          <a:lstStyle/>
+          <a:p>
+            <a:pPr algn="l">
+              <a:lnSpc>
+                <a:spcPts val="811"/>
+              </a:lnSpc>
+            </a:pPr>
+            <a:r>
+              <a:rPr sz="560" b="1" spc="80">
                 <a:solidFill>
                   <a:srgbClr val="FFFFFF"/>
                 </a:solidFill>
